--- a/Lecture_Slides/PH 123 Lecture 15.pptx
+++ b/Lecture_Slides/PH 123 Lecture 15.pptx
@@ -5,7 +5,7 @@
     <p:sldMasterId id="2147483648" r:id="rId1"/>
   </p:sldMasterIdLst>
   <p:notesMasterIdLst>
-    <p:notesMasterId r:id="rId57"/>
+    <p:notesMasterId r:id="rId58"/>
   </p:notesMasterIdLst>
   <p:sldIdLst>
     <p:sldId id="315" r:id="rId2"/>
@@ -29,40 +29,41 @@
     <p:sldId id="1462" r:id="rId20"/>
     <p:sldId id="1463" r:id="rId21"/>
     <p:sldId id="1474" r:id="rId22"/>
-    <p:sldId id="1475" r:id="rId23"/>
-    <p:sldId id="1464" r:id="rId24"/>
-    <p:sldId id="1465" r:id="rId25"/>
-    <p:sldId id="302" r:id="rId26"/>
-    <p:sldId id="1466" r:id="rId27"/>
-    <p:sldId id="1467" r:id="rId28"/>
-    <p:sldId id="258" r:id="rId29"/>
-    <p:sldId id="1468" r:id="rId30"/>
-    <p:sldId id="1469" r:id="rId31"/>
-    <p:sldId id="1470" r:id="rId32"/>
-    <p:sldId id="1471" r:id="rId33"/>
-    <p:sldId id="313" r:id="rId34"/>
-    <p:sldId id="304" r:id="rId35"/>
-    <p:sldId id="293" r:id="rId36"/>
-    <p:sldId id="294" r:id="rId37"/>
-    <p:sldId id="1472" r:id="rId38"/>
-    <p:sldId id="275" r:id="rId39"/>
-    <p:sldId id="1447" r:id="rId40"/>
-    <p:sldId id="260" r:id="rId41"/>
-    <p:sldId id="263" r:id="rId42"/>
-    <p:sldId id="1445" r:id="rId43"/>
-    <p:sldId id="282" r:id="rId44"/>
-    <p:sldId id="1446" r:id="rId45"/>
-    <p:sldId id="317" r:id="rId46"/>
-    <p:sldId id="262" r:id="rId47"/>
-    <p:sldId id="279" r:id="rId48"/>
-    <p:sldId id="281" r:id="rId49"/>
-    <p:sldId id="278" r:id="rId50"/>
-    <p:sldId id="268" r:id="rId51"/>
-    <p:sldId id="270" r:id="rId52"/>
-    <p:sldId id="269" r:id="rId53"/>
-    <p:sldId id="272" r:id="rId54"/>
-    <p:sldId id="277" r:id="rId55"/>
-    <p:sldId id="316" r:id="rId56"/>
+    <p:sldId id="1476" r:id="rId23"/>
+    <p:sldId id="1475" r:id="rId24"/>
+    <p:sldId id="1464" r:id="rId25"/>
+    <p:sldId id="1465" r:id="rId26"/>
+    <p:sldId id="302" r:id="rId27"/>
+    <p:sldId id="1466" r:id="rId28"/>
+    <p:sldId id="1467" r:id="rId29"/>
+    <p:sldId id="258" r:id="rId30"/>
+    <p:sldId id="1468" r:id="rId31"/>
+    <p:sldId id="1469" r:id="rId32"/>
+    <p:sldId id="1470" r:id="rId33"/>
+    <p:sldId id="1471" r:id="rId34"/>
+    <p:sldId id="313" r:id="rId35"/>
+    <p:sldId id="304" r:id="rId36"/>
+    <p:sldId id="293" r:id="rId37"/>
+    <p:sldId id="294" r:id="rId38"/>
+    <p:sldId id="1472" r:id="rId39"/>
+    <p:sldId id="275" r:id="rId40"/>
+    <p:sldId id="1447" r:id="rId41"/>
+    <p:sldId id="260" r:id="rId42"/>
+    <p:sldId id="263" r:id="rId43"/>
+    <p:sldId id="1445" r:id="rId44"/>
+    <p:sldId id="282" r:id="rId45"/>
+    <p:sldId id="1446" r:id="rId46"/>
+    <p:sldId id="317" r:id="rId47"/>
+    <p:sldId id="262" r:id="rId48"/>
+    <p:sldId id="279" r:id="rId49"/>
+    <p:sldId id="281" r:id="rId50"/>
+    <p:sldId id="278" r:id="rId51"/>
+    <p:sldId id="268" r:id="rId52"/>
+    <p:sldId id="270" r:id="rId53"/>
+    <p:sldId id="269" r:id="rId54"/>
+    <p:sldId id="272" r:id="rId55"/>
+    <p:sldId id="277" r:id="rId56"/>
+    <p:sldId id="316" r:id="rId57"/>
   </p:sldIdLst>
   <p:sldSz cx="9144000" cy="6858000" type="screen4x3"/>
   <p:notesSz cx="6858000" cy="9144000"/>
@@ -180,1084 +181,23 @@
 </p:presentation>
 </file>
 
-<file path=ppt/revisionInfo.xml><?xml version="1.0" encoding="utf-8"?>
-<p1510:revInfo xmlns:a="http://schemas.openxmlformats.org/drawingml/2006/main" xmlns:r="http://schemas.openxmlformats.org/officeDocument/2006/relationships" xmlns:p1510="http://schemas.microsoft.com/office/powerpoint/2015/10/main">
-  <p1510:revLst>
-    <p1510:client id="{8AD79B72-DC24-4454-A23F-1B1CC88EE569}" v="19" dt="2025-05-19T18:50:51.896"/>
-  </p1510:revLst>
-</p1510:revInfo>
-</file>
-
 <file path=ppt/changesInfos/changesInfo1.xml><?xml version="1.0" encoding="utf-8"?>
 <pc:chgInfo xmlns:a="http://schemas.openxmlformats.org/drawingml/2006/main" xmlns:r="http://schemas.openxmlformats.org/officeDocument/2006/relationships" xmlns:ac="http://schemas.microsoft.com/office/drawing/2013/main/command" xmlns:pc="http://schemas.microsoft.com/office/powerpoint/2013/main/command">
   <pc:docChgLst>
-    <pc:chgData name="Lines, Todd" userId="afaf7c3a-e8aa-4568-882a-02ad8f9e19b0" providerId="ADAL" clId="{8AD79B72-DC24-4454-A23F-1B1CC88EE569}"/>
-    <pc:docChg chg="undo custSel addSld delSld modSld sldOrd">
-      <pc:chgData name="Lines, Todd" userId="afaf7c3a-e8aa-4568-882a-02ad8f9e19b0" providerId="ADAL" clId="{8AD79B72-DC24-4454-A23F-1B1CC88EE569}" dt="2025-05-19T19:19:15.303" v="92" actId="14100"/>
+    <pc:chgData name="Lines, Todd" userId="afaf7c3a-e8aa-4568-882a-02ad8f9e19b0" providerId="ADAL" clId="{5FF5AC1B-ABA9-43D7-A1E3-2D92732CD6E2}"/>
+    <pc:docChg chg="custSel addSld modSld">
+      <pc:chgData name="Lines, Todd" userId="afaf7c3a-e8aa-4568-882a-02ad8f9e19b0" providerId="ADAL" clId="{5FF5AC1B-ABA9-43D7-A1E3-2D92732CD6E2}" dt="2026-05-18T17:39:34.048" v="22" actId="1076"/>
       <pc:docMkLst>
         <pc:docMk/>
       </pc:docMkLst>
-      <pc:sldChg chg="del">
-        <pc:chgData name="Lines, Todd" userId="afaf7c3a-e8aa-4568-882a-02ad8f9e19b0" providerId="ADAL" clId="{8AD79B72-DC24-4454-A23F-1B1CC88EE569}" dt="2025-05-16T19:59:20.116" v="3" actId="47"/>
-        <pc:sldMkLst>
-          <pc:docMk/>
-          <pc:sldMk cId="0" sldId="257"/>
-        </pc:sldMkLst>
-      </pc:sldChg>
-      <pc:sldChg chg="del">
-        <pc:chgData name="Lines, Todd" userId="afaf7c3a-e8aa-4568-882a-02ad8f9e19b0" providerId="ADAL" clId="{8AD79B72-DC24-4454-A23F-1B1CC88EE569}" dt="2025-05-16T19:59:20.116" v="3" actId="47"/>
-        <pc:sldMkLst>
-          <pc:docMk/>
-          <pc:sldMk cId="0" sldId="258"/>
-        </pc:sldMkLst>
-      </pc:sldChg>
-      <pc:sldChg chg="addSp delSp modSp add mod">
-        <pc:chgData name="Lines, Todd" userId="afaf7c3a-e8aa-4568-882a-02ad8f9e19b0" providerId="ADAL" clId="{8AD79B72-DC24-4454-A23F-1B1CC88EE569}" dt="2025-05-16T20:35:51.766" v="57" actId="21"/>
-        <pc:sldMkLst>
-          <pc:docMk/>
-          <pc:sldMk cId="2323903342" sldId="258"/>
-        </pc:sldMkLst>
-        <pc:spChg chg="add mod">
-          <ac:chgData name="Lines, Todd" userId="afaf7c3a-e8aa-4568-882a-02ad8f9e19b0" providerId="ADAL" clId="{8AD79B72-DC24-4454-A23F-1B1CC88EE569}" dt="2025-05-16T20:35:39.929" v="55" actId="1076"/>
-          <ac:spMkLst>
-            <pc:docMk/>
-            <pc:sldMk cId="2323903342" sldId="258"/>
-            <ac:spMk id="2" creationId="{F04141CB-434C-9EC9-EB66-4C3CACC0C4AA}"/>
-          </ac:spMkLst>
-        </pc:spChg>
-        <pc:spChg chg="add mod">
-          <ac:chgData name="Lines, Todd" userId="afaf7c3a-e8aa-4568-882a-02ad8f9e19b0" providerId="ADAL" clId="{8AD79B72-DC24-4454-A23F-1B1CC88EE569}" dt="2025-05-16T20:35:39.929" v="55" actId="1076"/>
-          <ac:spMkLst>
-            <pc:docMk/>
-            <pc:sldMk cId="2323903342" sldId="258"/>
-            <ac:spMk id="3" creationId="{FF3F4F97-3F82-164E-DFD8-40F625416A5C}"/>
-          </ac:spMkLst>
-        </pc:spChg>
-      </pc:sldChg>
-      <pc:sldChg chg="del">
-        <pc:chgData name="Lines, Todd" userId="afaf7c3a-e8aa-4568-882a-02ad8f9e19b0" providerId="ADAL" clId="{8AD79B72-DC24-4454-A23F-1B1CC88EE569}" dt="2025-05-16T19:59:20.116" v="3" actId="47"/>
-        <pc:sldMkLst>
-          <pc:docMk/>
-          <pc:sldMk cId="0" sldId="259"/>
-        </pc:sldMkLst>
-      </pc:sldChg>
-      <pc:sldChg chg="add del ord">
-        <pc:chgData name="Lines, Todd" userId="afaf7c3a-e8aa-4568-882a-02ad8f9e19b0" providerId="ADAL" clId="{8AD79B72-DC24-4454-A23F-1B1CC88EE569}" dt="2025-05-16T20:03:31.887" v="14"/>
-        <pc:sldMkLst>
-          <pc:docMk/>
-          <pc:sldMk cId="0" sldId="260"/>
-        </pc:sldMkLst>
-      </pc:sldChg>
-      <pc:sldChg chg="add del ord">
-        <pc:chgData name="Lines, Todd" userId="afaf7c3a-e8aa-4568-882a-02ad8f9e19b0" providerId="ADAL" clId="{8AD79B72-DC24-4454-A23F-1B1CC88EE569}" dt="2025-05-16T20:07:24.098" v="22"/>
-        <pc:sldMkLst>
-          <pc:docMk/>
-          <pc:sldMk cId="0" sldId="261"/>
-        </pc:sldMkLst>
-      </pc:sldChg>
-      <pc:sldChg chg="add del">
-        <pc:chgData name="Lines, Todd" userId="afaf7c3a-e8aa-4568-882a-02ad8f9e19b0" providerId="ADAL" clId="{8AD79B72-DC24-4454-A23F-1B1CC88EE569}" dt="2025-05-16T20:01:26.322" v="5"/>
-        <pc:sldMkLst>
-          <pc:docMk/>
-          <pc:sldMk cId="0" sldId="262"/>
-        </pc:sldMkLst>
-      </pc:sldChg>
-      <pc:sldChg chg="add del ord">
-        <pc:chgData name="Lines, Todd" userId="afaf7c3a-e8aa-4568-882a-02ad8f9e19b0" providerId="ADAL" clId="{8AD79B72-DC24-4454-A23F-1B1CC88EE569}" dt="2025-05-16T20:03:31.887" v="14"/>
-        <pc:sldMkLst>
-          <pc:docMk/>
-          <pc:sldMk cId="0" sldId="263"/>
-        </pc:sldMkLst>
-      </pc:sldChg>
-      <pc:sldChg chg="del">
-        <pc:chgData name="Lines, Todd" userId="afaf7c3a-e8aa-4568-882a-02ad8f9e19b0" providerId="ADAL" clId="{8AD79B72-DC24-4454-A23F-1B1CC88EE569}" dt="2025-05-16T19:59:20.116" v="3" actId="47"/>
-        <pc:sldMkLst>
-          <pc:docMk/>
-          <pc:sldMk cId="0" sldId="264"/>
-        </pc:sldMkLst>
-      </pc:sldChg>
-      <pc:sldChg chg="del">
-        <pc:chgData name="Lines, Todd" userId="afaf7c3a-e8aa-4568-882a-02ad8f9e19b0" providerId="ADAL" clId="{8AD79B72-DC24-4454-A23F-1B1CC88EE569}" dt="2025-05-16T19:59:20.116" v="3" actId="47"/>
-        <pc:sldMkLst>
-          <pc:docMk/>
-          <pc:sldMk cId="0" sldId="265"/>
-        </pc:sldMkLst>
-      </pc:sldChg>
-      <pc:sldChg chg="del">
-        <pc:chgData name="Lines, Todd" userId="afaf7c3a-e8aa-4568-882a-02ad8f9e19b0" providerId="ADAL" clId="{8AD79B72-DC24-4454-A23F-1B1CC88EE569}" dt="2025-05-16T19:59:20.116" v="3" actId="47"/>
-        <pc:sldMkLst>
-          <pc:docMk/>
-          <pc:sldMk cId="0" sldId="266"/>
-        </pc:sldMkLst>
-      </pc:sldChg>
-      <pc:sldChg chg="del">
-        <pc:chgData name="Lines, Todd" userId="afaf7c3a-e8aa-4568-882a-02ad8f9e19b0" providerId="ADAL" clId="{8AD79B72-DC24-4454-A23F-1B1CC88EE569}" dt="2025-05-16T19:59:20.116" v="3" actId="47"/>
-        <pc:sldMkLst>
-          <pc:docMk/>
-          <pc:sldMk cId="0" sldId="267"/>
-        </pc:sldMkLst>
-      </pc:sldChg>
-      <pc:sldChg chg="add del">
-        <pc:chgData name="Lines, Todd" userId="afaf7c3a-e8aa-4568-882a-02ad8f9e19b0" providerId="ADAL" clId="{8AD79B72-DC24-4454-A23F-1B1CC88EE569}" dt="2025-05-16T20:03:15.480" v="12"/>
-        <pc:sldMkLst>
-          <pc:docMk/>
-          <pc:sldMk cId="0" sldId="268"/>
-        </pc:sldMkLst>
-      </pc:sldChg>
-      <pc:sldChg chg="add del">
-        <pc:chgData name="Lines, Todd" userId="afaf7c3a-e8aa-4568-882a-02ad8f9e19b0" providerId="ADAL" clId="{8AD79B72-DC24-4454-A23F-1B1CC88EE569}" dt="2025-05-16T20:03:15.480" v="12"/>
-        <pc:sldMkLst>
-          <pc:docMk/>
-          <pc:sldMk cId="0" sldId="269"/>
-        </pc:sldMkLst>
-      </pc:sldChg>
-      <pc:sldChg chg="add del ord">
-        <pc:chgData name="Lines, Todd" userId="afaf7c3a-e8aa-4568-882a-02ad8f9e19b0" providerId="ADAL" clId="{8AD79B72-DC24-4454-A23F-1B1CC88EE569}" dt="2025-05-16T20:11:25.672" v="30"/>
-        <pc:sldMkLst>
-          <pc:docMk/>
-          <pc:sldMk cId="0" sldId="270"/>
-        </pc:sldMkLst>
-      </pc:sldChg>
-      <pc:sldChg chg="del">
-        <pc:chgData name="Lines, Todd" userId="afaf7c3a-e8aa-4568-882a-02ad8f9e19b0" providerId="ADAL" clId="{8AD79B72-DC24-4454-A23F-1B1CC88EE569}" dt="2025-05-16T19:59:20.116" v="3" actId="47"/>
-        <pc:sldMkLst>
-          <pc:docMk/>
-          <pc:sldMk cId="0" sldId="271"/>
-        </pc:sldMkLst>
-      </pc:sldChg>
-      <pc:sldChg chg="add del">
-        <pc:chgData name="Lines, Todd" userId="afaf7c3a-e8aa-4568-882a-02ad8f9e19b0" providerId="ADAL" clId="{8AD79B72-DC24-4454-A23F-1B1CC88EE569}" dt="2025-05-16T20:03:15.480" v="12"/>
-        <pc:sldMkLst>
-          <pc:docMk/>
-          <pc:sldMk cId="0" sldId="272"/>
-        </pc:sldMkLst>
-      </pc:sldChg>
-      <pc:sldChg chg="del">
-        <pc:chgData name="Lines, Todd" userId="afaf7c3a-e8aa-4568-882a-02ad8f9e19b0" providerId="ADAL" clId="{8AD79B72-DC24-4454-A23F-1B1CC88EE569}" dt="2025-05-16T19:59:20.116" v="3" actId="47"/>
-        <pc:sldMkLst>
-          <pc:docMk/>
-          <pc:sldMk cId="0" sldId="273"/>
-        </pc:sldMkLst>
-      </pc:sldChg>
-      <pc:sldChg chg="del">
-        <pc:chgData name="Lines, Todd" userId="afaf7c3a-e8aa-4568-882a-02ad8f9e19b0" providerId="ADAL" clId="{8AD79B72-DC24-4454-A23F-1B1CC88EE569}" dt="2025-05-16T19:59:20.116" v="3" actId="47"/>
-        <pc:sldMkLst>
-          <pc:docMk/>
-          <pc:sldMk cId="0" sldId="274"/>
-        </pc:sldMkLst>
-      </pc:sldChg>
-      <pc:sldChg chg="del">
-        <pc:chgData name="Lines, Todd" userId="afaf7c3a-e8aa-4568-882a-02ad8f9e19b0" providerId="ADAL" clId="{8AD79B72-DC24-4454-A23F-1B1CC88EE569}" dt="2025-05-16T19:59:20.116" v="3" actId="47"/>
-        <pc:sldMkLst>
-          <pc:docMk/>
-          <pc:sldMk cId="0" sldId="275"/>
-        </pc:sldMkLst>
-      </pc:sldChg>
-      <pc:sldChg chg="add">
-        <pc:chgData name="Lines, Todd" userId="afaf7c3a-e8aa-4568-882a-02ad8f9e19b0" providerId="ADAL" clId="{8AD79B72-DC24-4454-A23F-1B1CC88EE569}" dt="2025-05-16T20:07:01.920" v="20"/>
-        <pc:sldMkLst>
-          <pc:docMk/>
-          <pc:sldMk cId="1908266085" sldId="275"/>
-        </pc:sldMkLst>
-      </pc:sldChg>
-      <pc:sldChg chg="del">
-        <pc:chgData name="Lines, Todd" userId="afaf7c3a-e8aa-4568-882a-02ad8f9e19b0" providerId="ADAL" clId="{8AD79B72-DC24-4454-A23F-1B1CC88EE569}" dt="2025-05-16T19:59:20.116" v="3" actId="47"/>
-        <pc:sldMkLst>
-          <pc:docMk/>
-          <pc:sldMk cId="0" sldId="276"/>
-        </pc:sldMkLst>
-      </pc:sldChg>
-      <pc:sldChg chg="add">
-        <pc:chgData name="Lines, Todd" userId="afaf7c3a-e8aa-4568-882a-02ad8f9e19b0" providerId="ADAL" clId="{8AD79B72-DC24-4454-A23F-1B1CC88EE569}" dt="2025-05-16T20:07:01.920" v="20"/>
-        <pc:sldMkLst>
-          <pc:docMk/>
-          <pc:sldMk cId="4191840703" sldId="276"/>
-        </pc:sldMkLst>
-      </pc:sldChg>
-      <pc:sldChg chg="add">
-        <pc:chgData name="Lines, Todd" userId="afaf7c3a-e8aa-4568-882a-02ad8f9e19b0" providerId="ADAL" clId="{8AD79B72-DC24-4454-A23F-1B1CC88EE569}" dt="2025-05-16T20:03:15.480" v="12"/>
-        <pc:sldMkLst>
-          <pc:docMk/>
-          <pc:sldMk cId="0" sldId="277"/>
-        </pc:sldMkLst>
-      </pc:sldChg>
-      <pc:sldChg chg="add del">
-        <pc:chgData name="Lines, Todd" userId="afaf7c3a-e8aa-4568-882a-02ad8f9e19b0" providerId="ADAL" clId="{8AD79B72-DC24-4454-A23F-1B1CC88EE569}" dt="2025-05-16T20:03:15.480" v="12"/>
-        <pc:sldMkLst>
-          <pc:docMk/>
-          <pc:sldMk cId="0" sldId="278"/>
-        </pc:sldMkLst>
-      </pc:sldChg>
-      <pc:sldChg chg="add del">
-        <pc:chgData name="Lines, Todd" userId="afaf7c3a-e8aa-4568-882a-02ad8f9e19b0" providerId="ADAL" clId="{8AD79B72-DC24-4454-A23F-1B1CC88EE569}" dt="2025-05-16T20:03:15.480" v="12"/>
-        <pc:sldMkLst>
-          <pc:docMk/>
-          <pc:sldMk cId="0" sldId="279"/>
-        </pc:sldMkLst>
-      </pc:sldChg>
-      <pc:sldChg chg="del">
-        <pc:chgData name="Lines, Todd" userId="afaf7c3a-e8aa-4568-882a-02ad8f9e19b0" providerId="ADAL" clId="{8AD79B72-DC24-4454-A23F-1B1CC88EE569}" dt="2025-05-16T19:59:20.116" v="3" actId="47"/>
-        <pc:sldMkLst>
-          <pc:docMk/>
-          <pc:sldMk cId="0" sldId="280"/>
-        </pc:sldMkLst>
-      </pc:sldChg>
-      <pc:sldChg chg="add del">
-        <pc:chgData name="Lines, Todd" userId="afaf7c3a-e8aa-4568-882a-02ad8f9e19b0" providerId="ADAL" clId="{8AD79B72-DC24-4454-A23F-1B1CC88EE569}" dt="2025-05-16T20:03:15.480" v="12"/>
-        <pc:sldMkLst>
-          <pc:docMk/>
-          <pc:sldMk cId="0" sldId="281"/>
-        </pc:sldMkLst>
-      </pc:sldChg>
-      <pc:sldChg chg="add del ord">
-        <pc:chgData name="Lines, Todd" userId="afaf7c3a-e8aa-4568-882a-02ad8f9e19b0" providerId="ADAL" clId="{8AD79B72-DC24-4454-A23F-1B1CC88EE569}" dt="2025-05-16T20:03:31.887" v="14"/>
-        <pc:sldMkLst>
-          <pc:docMk/>
-          <pc:sldMk cId="0" sldId="282"/>
-        </pc:sldMkLst>
-      </pc:sldChg>
-      <pc:sldChg chg="del">
-        <pc:chgData name="Lines, Todd" userId="afaf7c3a-e8aa-4568-882a-02ad8f9e19b0" providerId="ADAL" clId="{8AD79B72-DC24-4454-A23F-1B1CC88EE569}" dt="2025-05-16T19:59:20.116" v="3" actId="47"/>
-        <pc:sldMkLst>
-          <pc:docMk/>
-          <pc:sldMk cId="0" sldId="283"/>
-        </pc:sldMkLst>
-      </pc:sldChg>
-      <pc:sldChg chg="del">
-        <pc:chgData name="Lines, Todd" userId="afaf7c3a-e8aa-4568-882a-02ad8f9e19b0" providerId="ADAL" clId="{8AD79B72-DC24-4454-A23F-1B1CC88EE569}" dt="2025-05-16T19:59:20.116" v="3" actId="47"/>
-        <pc:sldMkLst>
-          <pc:docMk/>
-          <pc:sldMk cId="0" sldId="284"/>
-        </pc:sldMkLst>
-      </pc:sldChg>
-      <pc:sldChg chg="del">
-        <pc:chgData name="Lines, Todd" userId="afaf7c3a-e8aa-4568-882a-02ad8f9e19b0" providerId="ADAL" clId="{8AD79B72-DC24-4454-A23F-1B1CC88EE569}" dt="2025-05-16T19:59:20.116" v="3" actId="47"/>
-        <pc:sldMkLst>
-          <pc:docMk/>
-          <pc:sldMk cId="0" sldId="285"/>
-        </pc:sldMkLst>
-      </pc:sldChg>
-      <pc:sldChg chg="del">
-        <pc:chgData name="Lines, Todd" userId="afaf7c3a-e8aa-4568-882a-02ad8f9e19b0" providerId="ADAL" clId="{8AD79B72-DC24-4454-A23F-1B1CC88EE569}" dt="2025-05-16T19:59:20.116" v="3" actId="47"/>
-        <pc:sldMkLst>
-          <pc:docMk/>
-          <pc:sldMk cId="0" sldId="286"/>
-        </pc:sldMkLst>
-      </pc:sldChg>
-      <pc:sldChg chg="del">
-        <pc:chgData name="Lines, Todd" userId="afaf7c3a-e8aa-4568-882a-02ad8f9e19b0" providerId="ADAL" clId="{8AD79B72-DC24-4454-A23F-1B1CC88EE569}" dt="2025-05-16T19:59:20.116" v="3" actId="47"/>
-        <pc:sldMkLst>
-          <pc:docMk/>
-          <pc:sldMk cId="0" sldId="287"/>
-        </pc:sldMkLst>
-      </pc:sldChg>
-      <pc:sldChg chg="del">
-        <pc:chgData name="Lines, Todd" userId="afaf7c3a-e8aa-4568-882a-02ad8f9e19b0" providerId="ADAL" clId="{8AD79B72-DC24-4454-A23F-1B1CC88EE569}" dt="2025-05-16T19:59:20.116" v="3" actId="47"/>
-        <pc:sldMkLst>
-          <pc:docMk/>
-          <pc:sldMk cId="0" sldId="288"/>
-        </pc:sldMkLst>
-      </pc:sldChg>
-      <pc:sldChg chg="del">
-        <pc:chgData name="Lines, Todd" userId="afaf7c3a-e8aa-4568-882a-02ad8f9e19b0" providerId="ADAL" clId="{8AD79B72-DC24-4454-A23F-1B1CC88EE569}" dt="2025-05-16T19:59:20.116" v="3" actId="47"/>
-        <pc:sldMkLst>
-          <pc:docMk/>
-          <pc:sldMk cId="0" sldId="289"/>
-        </pc:sldMkLst>
-      </pc:sldChg>
-      <pc:sldChg chg="del">
-        <pc:chgData name="Lines, Todd" userId="afaf7c3a-e8aa-4568-882a-02ad8f9e19b0" providerId="ADAL" clId="{8AD79B72-DC24-4454-A23F-1B1CC88EE569}" dt="2025-05-16T19:59:20.116" v="3" actId="47"/>
-        <pc:sldMkLst>
-          <pc:docMk/>
-          <pc:sldMk cId="0" sldId="290"/>
-        </pc:sldMkLst>
-      </pc:sldChg>
-      <pc:sldChg chg="del">
-        <pc:chgData name="Lines, Todd" userId="afaf7c3a-e8aa-4568-882a-02ad8f9e19b0" providerId="ADAL" clId="{8AD79B72-DC24-4454-A23F-1B1CC88EE569}" dt="2025-05-16T19:59:20.116" v="3" actId="47"/>
-        <pc:sldMkLst>
-          <pc:docMk/>
-          <pc:sldMk cId="0" sldId="291"/>
-        </pc:sldMkLst>
-      </pc:sldChg>
-      <pc:sldChg chg="del">
-        <pc:chgData name="Lines, Todd" userId="afaf7c3a-e8aa-4568-882a-02ad8f9e19b0" providerId="ADAL" clId="{8AD79B72-DC24-4454-A23F-1B1CC88EE569}" dt="2025-05-16T19:59:20.116" v="3" actId="47"/>
-        <pc:sldMkLst>
-          <pc:docMk/>
-          <pc:sldMk cId="0" sldId="292"/>
-        </pc:sldMkLst>
-      </pc:sldChg>
-      <pc:sldChg chg="add del">
-        <pc:chgData name="Lines, Todd" userId="afaf7c3a-e8aa-4568-882a-02ad8f9e19b0" providerId="ADAL" clId="{8AD79B72-DC24-4454-A23F-1B1CC88EE569}" dt="2025-05-16T20:07:01.920" v="20"/>
-        <pc:sldMkLst>
-          <pc:docMk/>
-          <pc:sldMk cId="0" sldId="293"/>
-        </pc:sldMkLst>
-      </pc:sldChg>
-      <pc:sldChg chg="add del">
-        <pc:chgData name="Lines, Todd" userId="afaf7c3a-e8aa-4568-882a-02ad8f9e19b0" providerId="ADAL" clId="{8AD79B72-DC24-4454-A23F-1B1CC88EE569}" dt="2025-05-16T20:07:01.920" v="20"/>
-        <pc:sldMkLst>
-          <pc:docMk/>
-          <pc:sldMk cId="0" sldId="294"/>
-        </pc:sldMkLst>
-      </pc:sldChg>
-      <pc:sldChg chg="del">
-        <pc:chgData name="Lines, Todd" userId="afaf7c3a-e8aa-4568-882a-02ad8f9e19b0" providerId="ADAL" clId="{8AD79B72-DC24-4454-A23F-1B1CC88EE569}" dt="2025-05-16T19:59:20.116" v="3" actId="47"/>
-        <pc:sldMkLst>
-          <pc:docMk/>
-          <pc:sldMk cId="1645093065" sldId="295"/>
-        </pc:sldMkLst>
-      </pc:sldChg>
-      <pc:sldChg chg="del">
-        <pc:chgData name="Lines, Todd" userId="afaf7c3a-e8aa-4568-882a-02ad8f9e19b0" providerId="ADAL" clId="{8AD79B72-DC24-4454-A23F-1B1CC88EE569}" dt="2025-05-16T19:59:20.116" v="3" actId="47"/>
-        <pc:sldMkLst>
-          <pc:docMk/>
-          <pc:sldMk cId="2252365894" sldId="296"/>
-        </pc:sldMkLst>
-      </pc:sldChg>
-      <pc:sldChg chg="del">
-        <pc:chgData name="Lines, Todd" userId="afaf7c3a-e8aa-4568-882a-02ad8f9e19b0" providerId="ADAL" clId="{8AD79B72-DC24-4454-A23F-1B1CC88EE569}" dt="2025-05-16T19:59:20.116" v="3" actId="47"/>
-        <pc:sldMkLst>
-          <pc:docMk/>
-          <pc:sldMk cId="2699387139" sldId="297"/>
-        </pc:sldMkLst>
-      </pc:sldChg>
-      <pc:sldChg chg="del">
-        <pc:chgData name="Lines, Todd" userId="afaf7c3a-e8aa-4568-882a-02ad8f9e19b0" providerId="ADAL" clId="{8AD79B72-DC24-4454-A23F-1B1CC88EE569}" dt="2025-05-16T19:59:20.116" v="3" actId="47"/>
-        <pc:sldMkLst>
-          <pc:docMk/>
-          <pc:sldMk cId="2409704130" sldId="298"/>
-        </pc:sldMkLst>
-      </pc:sldChg>
-      <pc:sldChg chg="del">
-        <pc:chgData name="Lines, Todd" userId="afaf7c3a-e8aa-4568-882a-02ad8f9e19b0" providerId="ADAL" clId="{8AD79B72-DC24-4454-A23F-1B1CC88EE569}" dt="2025-05-16T19:59:20.116" v="3" actId="47"/>
-        <pc:sldMkLst>
-          <pc:docMk/>
-          <pc:sldMk cId="2934368912" sldId="299"/>
-        </pc:sldMkLst>
-      </pc:sldChg>
-      <pc:sldChg chg="del">
-        <pc:chgData name="Lines, Todd" userId="afaf7c3a-e8aa-4568-882a-02ad8f9e19b0" providerId="ADAL" clId="{8AD79B72-DC24-4454-A23F-1B1CC88EE569}" dt="2025-05-16T19:59:20.116" v="3" actId="47"/>
-        <pc:sldMkLst>
-          <pc:docMk/>
-          <pc:sldMk cId="1619683466" sldId="300"/>
-        </pc:sldMkLst>
-      </pc:sldChg>
-      <pc:sldChg chg="del">
-        <pc:chgData name="Lines, Todd" userId="afaf7c3a-e8aa-4568-882a-02ad8f9e19b0" providerId="ADAL" clId="{8AD79B72-DC24-4454-A23F-1B1CC88EE569}" dt="2025-05-16T19:59:20.116" v="3" actId="47"/>
-        <pc:sldMkLst>
-          <pc:docMk/>
-          <pc:sldMk cId="2355989043" sldId="301"/>
-        </pc:sldMkLst>
-      </pc:sldChg>
-      <pc:sldChg chg="add">
-        <pc:chgData name="Lines, Todd" userId="afaf7c3a-e8aa-4568-882a-02ad8f9e19b0" providerId="ADAL" clId="{8AD79B72-DC24-4454-A23F-1B1CC88EE569}" dt="2025-05-16T20:07:01.920" v="20"/>
-        <pc:sldMkLst>
-          <pc:docMk/>
-          <pc:sldMk cId="2085335207" sldId="302"/>
-        </pc:sldMkLst>
-      </pc:sldChg>
-      <pc:sldChg chg="del">
-        <pc:chgData name="Lines, Todd" userId="afaf7c3a-e8aa-4568-882a-02ad8f9e19b0" providerId="ADAL" clId="{8AD79B72-DC24-4454-A23F-1B1CC88EE569}" dt="2025-05-16T19:59:20.116" v="3" actId="47"/>
-        <pc:sldMkLst>
-          <pc:docMk/>
-          <pc:sldMk cId="3986767374" sldId="303"/>
-        </pc:sldMkLst>
-      </pc:sldChg>
-      <pc:sldChg chg="add del">
-        <pc:chgData name="Lines, Todd" userId="afaf7c3a-e8aa-4568-882a-02ad8f9e19b0" providerId="ADAL" clId="{8AD79B72-DC24-4454-A23F-1B1CC88EE569}" dt="2025-05-16T20:07:01.920" v="20"/>
-        <pc:sldMkLst>
-          <pc:docMk/>
-          <pc:sldMk cId="3930234021" sldId="304"/>
-        </pc:sldMkLst>
-      </pc:sldChg>
-      <pc:sldChg chg="del">
-        <pc:chgData name="Lines, Todd" userId="afaf7c3a-e8aa-4568-882a-02ad8f9e19b0" providerId="ADAL" clId="{8AD79B72-DC24-4454-A23F-1B1CC88EE569}" dt="2025-05-16T19:59:20.116" v="3" actId="47"/>
-        <pc:sldMkLst>
-          <pc:docMk/>
-          <pc:sldMk cId="2548393931" sldId="305"/>
-        </pc:sldMkLst>
-      </pc:sldChg>
-      <pc:sldChg chg="del">
-        <pc:chgData name="Lines, Todd" userId="afaf7c3a-e8aa-4568-882a-02ad8f9e19b0" providerId="ADAL" clId="{8AD79B72-DC24-4454-A23F-1B1CC88EE569}" dt="2025-05-16T19:59:20.116" v="3" actId="47"/>
-        <pc:sldMkLst>
-          <pc:docMk/>
-          <pc:sldMk cId="778997698" sldId="306"/>
-        </pc:sldMkLst>
-      </pc:sldChg>
-      <pc:sldChg chg="del">
-        <pc:chgData name="Lines, Todd" userId="afaf7c3a-e8aa-4568-882a-02ad8f9e19b0" providerId="ADAL" clId="{8AD79B72-DC24-4454-A23F-1B1CC88EE569}" dt="2025-05-16T19:59:20.116" v="3" actId="47"/>
-        <pc:sldMkLst>
-          <pc:docMk/>
-          <pc:sldMk cId="713789300" sldId="307"/>
-        </pc:sldMkLst>
-      </pc:sldChg>
-      <pc:sldChg chg="del">
-        <pc:chgData name="Lines, Todd" userId="afaf7c3a-e8aa-4568-882a-02ad8f9e19b0" providerId="ADAL" clId="{8AD79B72-DC24-4454-A23F-1B1CC88EE569}" dt="2025-05-16T19:59:20.116" v="3" actId="47"/>
-        <pc:sldMkLst>
-          <pc:docMk/>
-          <pc:sldMk cId="2116385052" sldId="308"/>
-        </pc:sldMkLst>
-      </pc:sldChg>
-      <pc:sldChg chg="del">
-        <pc:chgData name="Lines, Todd" userId="afaf7c3a-e8aa-4568-882a-02ad8f9e19b0" providerId="ADAL" clId="{8AD79B72-DC24-4454-A23F-1B1CC88EE569}" dt="2025-05-16T19:59:20.116" v="3" actId="47"/>
-        <pc:sldMkLst>
-          <pc:docMk/>
-          <pc:sldMk cId="379048560" sldId="309"/>
-        </pc:sldMkLst>
-      </pc:sldChg>
-      <pc:sldChg chg="del">
-        <pc:chgData name="Lines, Todd" userId="afaf7c3a-e8aa-4568-882a-02ad8f9e19b0" providerId="ADAL" clId="{8AD79B72-DC24-4454-A23F-1B1CC88EE569}" dt="2025-05-16T19:59:20.116" v="3" actId="47"/>
-        <pc:sldMkLst>
-          <pc:docMk/>
-          <pc:sldMk cId="83185933" sldId="310"/>
-        </pc:sldMkLst>
-      </pc:sldChg>
-      <pc:sldChg chg="del">
-        <pc:chgData name="Lines, Todd" userId="afaf7c3a-e8aa-4568-882a-02ad8f9e19b0" providerId="ADAL" clId="{8AD79B72-DC24-4454-A23F-1B1CC88EE569}" dt="2025-05-16T19:59:20.116" v="3" actId="47"/>
-        <pc:sldMkLst>
-          <pc:docMk/>
-          <pc:sldMk cId="1628523531" sldId="311"/>
-        </pc:sldMkLst>
-      </pc:sldChg>
-      <pc:sldChg chg="del">
-        <pc:chgData name="Lines, Todd" userId="afaf7c3a-e8aa-4568-882a-02ad8f9e19b0" providerId="ADAL" clId="{8AD79B72-DC24-4454-A23F-1B1CC88EE569}" dt="2025-05-16T19:59:20.116" v="3" actId="47"/>
-        <pc:sldMkLst>
-          <pc:docMk/>
-          <pc:sldMk cId="596552400" sldId="312"/>
-        </pc:sldMkLst>
-      </pc:sldChg>
-      <pc:sldChg chg="del">
-        <pc:chgData name="Lines, Todd" userId="afaf7c3a-e8aa-4568-882a-02ad8f9e19b0" providerId="ADAL" clId="{8AD79B72-DC24-4454-A23F-1B1CC88EE569}" dt="2025-05-16T19:59:20.116" v="3" actId="47"/>
-        <pc:sldMkLst>
-          <pc:docMk/>
-          <pc:sldMk cId="1957286977" sldId="313"/>
-        </pc:sldMkLst>
-      </pc:sldChg>
-      <pc:sldChg chg="addSp delSp modSp add mod">
-        <pc:chgData name="Lines, Todd" userId="afaf7c3a-e8aa-4568-882a-02ad8f9e19b0" providerId="ADAL" clId="{8AD79B72-DC24-4454-A23F-1B1CC88EE569}" dt="2025-05-16T20:37:45.104" v="69" actId="478"/>
-        <pc:sldMkLst>
-          <pc:docMk/>
-          <pc:sldMk cId="3143524157" sldId="313"/>
-        </pc:sldMkLst>
-        <pc:spChg chg="add mod">
-          <ac:chgData name="Lines, Todd" userId="afaf7c3a-e8aa-4568-882a-02ad8f9e19b0" providerId="ADAL" clId="{8AD79B72-DC24-4454-A23F-1B1CC88EE569}" dt="2025-05-16T20:36:31.962" v="62"/>
-          <ac:spMkLst>
-            <pc:docMk/>
-            <pc:sldMk cId="3143524157" sldId="313"/>
-            <ac:spMk id="2" creationId="{1057EBEA-6288-A9C9-2757-59BE3283CDCB}"/>
-          </ac:spMkLst>
-        </pc:spChg>
-        <pc:spChg chg="add mod">
-          <ac:chgData name="Lines, Todd" userId="afaf7c3a-e8aa-4568-882a-02ad8f9e19b0" providerId="ADAL" clId="{8AD79B72-DC24-4454-A23F-1B1CC88EE569}" dt="2025-05-16T20:36:31.962" v="62"/>
-          <ac:spMkLst>
-            <pc:docMk/>
-            <pc:sldMk cId="3143524157" sldId="313"/>
-            <ac:spMk id="3" creationId="{6961757E-F015-9F82-4A7B-072A6ED52741}"/>
-          </ac:spMkLst>
-        </pc:spChg>
-      </pc:sldChg>
-      <pc:sldChg chg="del">
-        <pc:chgData name="Lines, Todd" userId="afaf7c3a-e8aa-4568-882a-02ad8f9e19b0" providerId="ADAL" clId="{8AD79B72-DC24-4454-A23F-1B1CC88EE569}" dt="2025-05-16T19:59:20.116" v="3" actId="47"/>
-        <pc:sldMkLst>
-          <pc:docMk/>
-          <pc:sldMk cId="3855450880" sldId="314"/>
-        </pc:sldMkLst>
-      </pc:sldChg>
       <pc:sldChg chg="modSp mod">
-        <pc:chgData name="Lines, Todd" userId="afaf7c3a-e8aa-4568-882a-02ad8f9e19b0" providerId="ADAL" clId="{8AD79B72-DC24-4454-A23F-1B1CC88EE569}" dt="2025-05-16T19:58:56.113" v="1" actId="20577"/>
-        <pc:sldMkLst>
-          <pc:docMk/>
-          <pc:sldMk cId="1699752763" sldId="315"/>
-        </pc:sldMkLst>
-        <pc:spChg chg="mod">
-          <ac:chgData name="Lines, Todd" userId="afaf7c3a-e8aa-4568-882a-02ad8f9e19b0" providerId="ADAL" clId="{8AD79B72-DC24-4454-A23F-1B1CC88EE569}" dt="2025-05-16T19:58:56.113" v="1" actId="20577"/>
-          <ac:spMkLst>
-            <pc:docMk/>
-            <pc:sldMk cId="1699752763" sldId="315"/>
-            <ac:spMk id="2" creationId="{F6EBDA18-4C41-A016-8191-98134C82AA3B}"/>
-          </ac:spMkLst>
-        </pc:spChg>
-      </pc:sldChg>
-      <pc:sldChg chg="del">
-        <pc:chgData name="Lines, Todd" userId="afaf7c3a-e8aa-4568-882a-02ad8f9e19b0" providerId="ADAL" clId="{8AD79B72-DC24-4454-A23F-1B1CC88EE569}" dt="2025-05-16T19:59:29.616" v="4" actId="47"/>
-        <pc:sldMkLst>
-          <pc:docMk/>
-          <pc:sldMk cId="19487424" sldId="317"/>
-        </pc:sldMkLst>
-      </pc:sldChg>
-      <pc:sldChg chg="addSp modSp new mod">
-        <pc:chgData name="Lines, Todd" userId="afaf7c3a-e8aa-4568-882a-02ad8f9e19b0" providerId="ADAL" clId="{8AD79B72-DC24-4454-A23F-1B1CC88EE569}" dt="2025-05-16T20:02:01.873" v="11" actId="1076"/>
-        <pc:sldMkLst>
-          <pc:docMk/>
-          <pc:sldMk cId="1796487365" sldId="317"/>
-        </pc:sldMkLst>
-        <pc:picChg chg="add mod">
-          <ac:chgData name="Lines, Todd" userId="afaf7c3a-e8aa-4568-882a-02ad8f9e19b0" providerId="ADAL" clId="{8AD79B72-DC24-4454-A23F-1B1CC88EE569}" dt="2025-05-16T20:02:01.873" v="11" actId="1076"/>
-          <ac:picMkLst>
-            <pc:docMk/>
-            <pc:sldMk cId="1796487365" sldId="317"/>
-            <ac:picMk id="3" creationId="{1662905F-17A5-E872-C3FC-65810E764E6E}"/>
-          </ac:picMkLst>
-        </pc:picChg>
-      </pc:sldChg>
-      <pc:sldChg chg="del">
-        <pc:chgData name="Lines, Todd" userId="afaf7c3a-e8aa-4568-882a-02ad8f9e19b0" providerId="ADAL" clId="{8AD79B72-DC24-4454-A23F-1B1CC88EE569}" dt="2025-05-16T19:59:29.616" v="4" actId="47"/>
-        <pc:sldMkLst>
-          <pc:docMk/>
-          <pc:sldMk cId="0" sldId="318"/>
-        </pc:sldMkLst>
-      </pc:sldChg>
-      <pc:sldChg chg="del">
-        <pc:chgData name="Lines, Todd" userId="afaf7c3a-e8aa-4568-882a-02ad8f9e19b0" providerId="ADAL" clId="{8AD79B72-DC24-4454-A23F-1B1CC88EE569}" dt="2025-05-16T19:59:29.616" v="4" actId="47"/>
-        <pc:sldMkLst>
-          <pc:docMk/>
-          <pc:sldMk cId="0" sldId="319"/>
-        </pc:sldMkLst>
-      </pc:sldChg>
-      <pc:sldChg chg="del">
-        <pc:chgData name="Lines, Todd" userId="afaf7c3a-e8aa-4568-882a-02ad8f9e19b0" providerId="ADAL" clId="{8AD79B72-DC24-4454-A23F-1B1CC88EE569}" dt="2025-05-16T19:59:29.616" v="4" actId="47"/>
-        <pc:sldMkLst>
-          <pc:docMk/>
-          <pc:sldMk cId="0" sldId="320"/>
-        </pc:sldMkLst>
-      </pc:sldChg>
-      <pc:sldChg chg="del">
-        <pc:chgData name="Lines, Todd" userId="afaf7c3a-e8aa-4568-882a-02ad8f9e19b0" providerId="ADAL" clId="{8AD79B72-DC24-4454-A23F-1B1CC88EE569}" dt="2025-05-16T19:59:29.616" v="4" actId="47"/>
-        <pc:sldMkLst>
-          <pc:docMk/>
-          <pc:sldMk cId="0" sldId="321"/>
-        </pc:sldMkLst>
-      </pc:sldChg>
-      <pc:sldChg chg="del">
-        <pc:chgData name="Lines, Todd" userId="afaf7c3a-e8aa-4568-882a-02ad8f9e19b0" providerId="ADAL" clId="{8AD79B72-DC24-4454-A23F-1B1CC88EE569}" dt="2025-05-16T19:59:29.616" v="4" actId="47"/>
-        <pc:sldMkLst>
-          <pc:docMk/>
-          <pc:sldMk cId="2278348990" sldId="322"/>
-        </pc:sldMkLst>
-      </pc:sldChg>
-      <pc:sldChg chg="del">
-        <pc:chgData name="Lines, Todd" userId="afaf7c3a-e8aa-4568-882a-02ad8f9e19b0" providerId="ADAL" clId="{8AD79B72-DC24-4454-A23F-1B1CC88EE569}" dt="2025-05-16T19:59:29.616" v="4" actId="47"/>
-        <pc:sldMkLst>
-          <pc:docMk/>
-          <pc:sldMk cId="2052374154" sldId="323"/>
-        </pc:sldMkLst>
-      </pc:sldChg>
-      <pc:sldChg chg="del">
-        <pc:chgData name="Lines, Todd" userId="afaf7c3a-e8aa-4568-882a-02ad8f9e19b0" providerId="ADAL" clId="{8AD79B72-DC24-4454-A23F-1B1CC88EE569}" dt="2025-05-16T19:59:07.554" v="2" actId="47"/>
-        <pc:sldMkLst>
-          <pc:docMk/>
-          <pc:sldMk cId="0" sldId="324"/>
-        </pc:sldMkLst>
-      </pc:sldChg>
-      <pc:sldChg chg="del">
-        <pc:chgData name="Lines, Todd" userId="afaf7c3a-e8aa-4568-882a-02ad8f9e19b0" providerId="ADAL" clId="{8AD79B72-DC24-4454-A23F-1B1CC88EE569}" dt="2025-05-16T19:59:29.616" v="4" actId="47"/>
-        <pc:sldMkLst>
-          <pc:docMk/>
-          <pc:sldMk cId="403411101" sldId="325"/>
-        </pc:sldMkLst>
-      </pc:sldChg>
-      <pc:sldChg chg="del">
-        <pc:chgData name="Lines, Todd" userId="afaf7c3a-e8aa-4568-882a-02ad8f9e19b0" providerId="ADAL" clId="{8AD79B72-DC24-4454-A23F-1B1CC88EE569}" dt="2025-05-16T19:59:07.554" v="2" actId="47"/>
-        <pc:sldMkLst>
-          <pc:docMk/>
-          <pc:sldMk cId="2672393111" sldId="326"/>
-        </pc:sldMkLst>
-      </pc:sldChg>
-      <pc:sldChg chg="del">
-        <pc:chgData name="Lines, Todd" userId="afaf7c3a-e8aa-4568-882a-02ad8f9e19b0" providerId="ADAL" clId="{8AD79B72-DC24-4454-A23F-1B1CC88EE569}" dt="2025-05-16T19:59:07.554" v="2" actId="47"/>
-        <pc:sldMkLst>
-          <pc:docMk/>
-          <pc:sldMk cId="0" sldId="1256"/>
-        </pc:sldMkLst>
-      </pc:sldChg>
-      <pc:sldChg chg="del">
-        <pc:chgData name="Lines, Todd" userId="afaf7c3a-e8aa-4568-882a-02ad8f9e19b0" providerId="ADAL" clId="{8AD79B72-DC24-4454-A23F-1B1CC88EE569}" dt="2025-05-16T19:59:07.554" v="2" actId="47"/>
-        <pc:sldMkLst>
-          <pc:docMk/>
-          <pc:sldMk cId="0" sldId="1257"/>
-        </pc:sldMkLst>
-      </pc:sldChg>
-      <pc:sldChg chg="del">
-        <pc:chgData name="Lines, Todd" userId="afaf7c3a-e8aa-4568-882a-02ad8f9e19b0" providerId="ADAL" clId="{8AD79B72-DC24-4454-A23F-1B1CC88EE569}" dt="2025-05-16T19:59:07.554" v="2" actId="47"/>
-        <pc:sldMkLst>
-          <pc:docMk/>
-          <pc:sldMk cId="0" sldId="1258"/>
-        </pc:sldMkLst>
-      </pc:sldChg>
-      <pc:sldChg chg="del">
-        <pc:chgData name="Lines, Todd" userId="afaf7c3a-e8aa-4568-882a-02ad8f9e19b0" providerId="ADAL" clId="{8AD79B72-DC24-4454-A23F-1B1CC88EE569}" dt="2025-05-16T19:59:07.554" v="2" actId="47"/>
-        <pc:sldMkLst>
-          <pc:docMk/>
-          <pc:sldMk cId="0" sldId="1351"/>
-        </pc:sldMkLst>
-      </pc:sldChg>
-      <pc:sldChg chg="del">
-        <pc:chgData name="Lines, Todd" userId="afaf7c3a-e8aa-4568-882a-02ad8f9e19b0" providerId="ADAL" clId="{8AD79B72-DC24-4454-A23F-1B1CC88EE569}" dt="2025-05-16T19:59:07.554" v="2" actId="47"/>
-        <pc:sldMkLst>
-          <pc:docMk/>
-          <pc:sldMk cId="0" sldId="1352"/>
-        </pc:sldMkLst>
-      </pc:sldChg>
-      <pc:sldChg chg="del">
-        <pc:chgData name="Lines, Todd" userId="afaf7c3a-e8aa-4568-882a-02ad8f9e19b0" providerId="ADAL" clId="{8AD79B72-DC24-4454-A23F-1B1CC88EE569}" dt="2025-05-16T19:59:07.554" v="2" actId="47"/>
-        <pc:sldMkLst>
-          <pc:docMk/>
-          <pc:sldMk cId="0" sldId="1353"/>
-        </pc:sldMkLst>
-      </pc:sldChg>
-      <pc:sldChg chg="del">
-        <pc:chgData name="Lines, Todd" userId="afaf7c3a-e8aa-4568-882a-02ad8f9e19b0" providerId="ADAL" clId="{8AD79B72-DC24-4454-A23F-1B1CC88EE569}" dt="2025-05-16T19:59:07.554" v="2" actId="47"/>
-        <pc:sldMkLst>
-          <pc:docMk/>
-          <pc:sldMk cId="0" sldId="1382"/>
-        </pc:sldMkLst>
-      </pc:sldChg>
-      <pc:sldChg chg="del">
-        <pc:chgData name="Lines, Todd" userId="afaf7c3a-e8aa-4568-882a-02ad8f9e19b0" providerId="ADAL" clId="{8AD79B72-DC24-4454-A23F-1B1CC88EE569}" dt="2025-05-16T19:59:07.554" v="2" actId="47"/>
-        <pc:sldMkLst>
-          <pc:docMk/>
-          <pc:sldMk cId="0" sldId="1384"/>
-        </pc:sldMkLst>
-      </pc:sldChg>
-      <pc:sldChg chg="del">
-        <pc:chgData name="Lines, Todd" userId="afaf7c3a-e8aa-4568-882a-02ad8f9e19b0" providerId="ADAL" clId="{8AD79B72-DC24-4454-A23F-1B1CC88EE569}" dt="2025-05-16T19:59:07.554" v="2" actId="47"/>
-        <pc:sldMkLst>
-          <pc:docMk/>
-          <pc:sldMk cId="0" sldId="1385"/>
-        </pc:sldMkLst>
-      </pc:sldChg>
-      <pc:sldChg chg="del">
-        <pc:chgData name="Lines, Todd" userId="afaf7c3a-e8aa-4568-882a-02ad8f9e19b0" providerId="ADAL" clId="{8AD79B72-DC24-4454-A23F-1B1CC88EE569}" dt="2025-05-16T19:59:07.554" v="2" actId="47"/>
-        <pc:sldMkLst>
-          <pc:docMk/>
-          <pc:sldMk cId="0" sldId="1386"/>
-        </pc:sldMkLst>
-      </pc:sldChg>
-      <pc:sldChg chg="del">
-        <pc:chgData name="Lines, Todd" userId="afaf7c3a-e8aa-4568-882a-02ad8f9e19b0" providerId="ADAL" clId="{8AD79B72-DC24-4454-A23F-1B1CC88EE569}" dt="2025-05-16T19:59:07.554" v="2" actId="47"/>
-        <pc:sldMkLst>
-          <pc:docMk/>
-          <pc:sldMk cId="0" sldId="1387"/>
-        </pc:sldMkLst>
-      </pc:sldChg>
-      <pc:sldChg chg="del">
-        <pc:chgData name="Lines, Todd" userId="afaf7c3a-e8aa-4568-882a-02ad8f9e19b0" providerId="ADAL" clId="{8AD79B72-DC24-4454-A23F-1B1CC88EE569}" dt="2025-05-16T19:59:07.554" v="2" actId="47"/>
-        <pc:sldMkLst>
-          <pc:docMk/>
-          <pc:sldMk cId="0" sldId="1388"/>
-        </pc:sldMkLst>
-      </pc:sldChg>
-      <pc:sldChg chg="del">
-        <pc:chgData name="Lines, Todd" userId="afaf7c3a-e8aa-4568-882a-02ad8f9e19b0" providerId="ADAL" clId="{8AD79B72-DC24-4454-A23F-1B1CC88EE569}" dt="2025-05-16T19:59:07.554" v="2" actId="47"/>
-        <pc:sldMkLst>
-          <pc:docMk/>
-          <pc:sldMk cId="0" sldId="1389"/>
-        </pc:sldMkLst>
-      </pc:sldChg>
-      <pc:sldChg chg="del">
-        <pc:chgData name="Lines, Todd" userId="afaf7c3a-e8aa-4568-882a-02ad8f9e19b0" providerId="ADAL" clId="{8AD79B72-DC24-4454-A23F-1B1CC88EE569}" dt="2025-05-16T19:59:07.554" v="2" actId="47"/>
-        <pc:sldMkLst>
-          <pc:docMk/>
-          <pc:sldMk cId="0" sldId="1390"/>
-        </pc:sldMkLst>
-      </pc:sldChg>
-      <pc:sldChg chg="del">
-        <pc:chgData name="Lines, Todd" userId="afaf7c3a-e8aa-4568-882a-02ad8f9e19b0" providerId="ADAL" clId="{8AD79B72-DC24-4454-A23F-1B1CC88EE569}" dt="2025-05-16T19:59:07.554" v="2" actId="47"/>
-        <pc:sldMkLst>
-          <pc:docMk/>
-          <pc:sldMk cId="0" sldId="1391"/>
-        </pc:sldMkLst>
-      </pc:sldChg>
-      <pc:sldChg chg="del">
-        <pc:chgData name="Lines, Todd" userId="afaf7c3a-e8aa-4568-882a-02ad8f9e19b0" providerId="ADAL" clId="{8AD79B72-DC24-4454-A23F-1B1CC88EE569}" dt="2025-05-16T19:59:07.554" v="2" actId="47"/>
-        <pc:sldMkLst>
-          <pc:docMk/>
-          <pc:sldMk cId="0" sldId="1393"/>
-        </pc:sldMkLst>
-      </pc:sldChg>
-      <pc:sldChg chg="del">
-        <pc:chgData name="Lines, Todd" userId="afaf7c3a-e8aa-4568-882a-02ad8f9e19b0" providerId="ADAL" clId="{8AD79B72-DC24-4454-A23F-1B1CC88EE569}" dt="2025-05-16T19:59:07.554" v="2" actId="47"/>
-        <pc:sldMkLst>
-          <pc:docMk/>
-          <pc:sldMk cId="1366019245" sldId="1394"/>
-        </pc:sldMkLst>
-      </pc:sldChg>
-      <pc:sldChg chg="del">
-        <pc:chgData name="Lines, Todd" userId="afaf7c3a-e8aa-4568-882a-02ad8f9e19b0" providerId="ADAL" clId="{8AD79B72-DC24-4454-A23F-1B1CC88EE569}" dt="2025-05-16T19:59:07.554" v="2" actId="47"/>
-        <pc:sldMkLst>
-          <pc:docMk/>
-          <pc:sldMk cId="0" sldId="1395"/>
-        </pc:sldMkLst>
-      </pc:sldChg>
-      <pc:sldChg chg="del">
-        <pc:chgData name="Lines, Todd" userId="afaf7c3a-e8aa-4568-882a-02ad8f9e19b0" providerId="ADAL" clId="{8AD79B72-DC24-4454-A23F-1B1CC88EE569}" dt="2025-05-16T19:59:07.554" v="2" actId="47"/>
-        <pc:sldMkLst>
-          <pc:docMk/>
-          <pc:sldMk cId="0" sldId="1396"/>
-        </pc:sldMkLst>
-      </pc:sldChg>
-      <pc:sldChg chg="del">
-        <pc:chgData name="Lines, Todd" userId="afaf7c3a-e8aa-4568-882a-02ad8f9e19b0" providerId="ADAL" clId="{8AD79B72-DC24-4454-A23F-1B1CC88EE569}" dt="2025-05-16T19:59:07.554" v="2" actId="47"/>
-        <pc:sldMkLst>
-          <pc:docMk/>
-          <pc:sldMk cId="1184595066" sldId="1397"/>
-        </pc:sldMkLst>
-      </pc:sldChg>
-      <pc:sldChg chg="add ord">
-        <pc:chgData name="Lines, Todd" userId="afaf7c3a-e8aa-4568-882a-02ad8f9e19b0" providerId="ADAL" clId="{8AD79B72-DC24-4454-A23F-1B1CC88EE569}" dt="2025-05-16T20:03:31.887" v="14"/>
-        <pc:sldMkLst>
-          <pc:docMk/>
-          <pc:sldMk cId="1121025108" sldId="1445"/>
-        </pc:sldMkLst>
-      </pc:sldChg>
-      <pc:sldChg chg="add ord">
-        <pc:chgData name="Lines, Todd" userId="afaf7c3a-e8aa-4568-882a-02ad8f9e19b0" providerId="ADAL" clId="{8AD79B72-DC24-4454-A23F-1B1CC88EE569}" dt="2025-05-16T20:03:31.887" v="14"/>
-        <pc:sldMkLst>
-          <pc:docMk/>
-          <pc:sldMk cId="3389873368" sldId="1446"/>
-        </pc:sldMkLst>
-      </pc:sldChg>
-      <pc:sldChg chg="addSp delSp modSp new mod modClrScheme chgLayout">
-        <pc:chgData name="Lines, Todd" userId="afaf7c3a-e8aa-4568-882a-02ad8f9e19b0" providerId="ADAL" clId="{8AD79B72-DC24-4454-A23F-1B1CC88EE569}" dt="2025-05-16T20:06:59.420" v="19" actId="20577"/>
-        <pc:sldMkLst>
-          <pc:docMk/>
-          <pc:sldMk cId="1678363897" sldId="1447"/>
-        </pc:sldMkLst>
-        <pc:spChg chg="add mod ord">
-          <ac:chgData name="Lines, Todd" userId="afaf7c3a-e8aa-4568-882a-02ad8f9e19b0" providerId="ADAL" clId="{8AD79B72-DC24-4454-A23F-1B1CC88EE569}" dt="2025-05-16T20:06:59.420" v="19" actId="20577"/>
-          <ac:spMkLst>
-            <pc:docMk/>
-            <pc:sldMk cId="1678363897" sldId="1447"/>
-            <ac:spMk id="4" creationId="{FFBAB1B2-47BA-5E31-620D-66C41272ED65}"/>
-          </ac:spMkLst>
-        </pc:spChg>
-        <pc:spChg chg="add mod ord">
-          <ac:chgData name="Lines, Todd" userId="afaf7c3a-e8aa-4568-882a-02ad8f9e19b0" providerId="ADAL" clId="{8AD79B72-DC24-4454-A23F-1B1CC88EE569}" dt="2025-05-16T20:06:57.472" v="16" actId="700"/>
-          <ac:spMkLst>
-            <pc:docMk/>
-            <pc:sldMk cId="1678363897" sldId="1447"/>
-            <ac:spMk id="5" creationId="{F4A352C9-EFEE-DF66-5F11-AEF140722258}"/>
-          </ac:spMkLst>
-        </pc:spChg>
-      </pc:sldChg>
-      <pc:sldChg chg="add">
-        <pc:chgData name="Lines, Todd" userId="afaf7c3a-e8aa-4568-882a-02ad8f9e19b0" providerId="ADAL" clId="{8AD79B72-DC24-4454-A23F-1B1CC88EE569}" dt="2025-05-16T20:07:01.920" v="20"/>
-        <pc:sldMkLst>
-          <pc:docMk/>
-          <pc:sldMk cId="0" sldId="1448"/>
-        </pc:sldMkLst>
-      </pc:sldChg>
-      <pc:sldChg chg="add">
-        <pc:chgData name="Lines, Todd" userId="afaf7c3a-e8aa-4568-882a-02ad8f9e19b0" providerId="ADAL" clId="{8AD79B72-DC24-4454-A23F-1B1CC88EE569}" dt="2025-05-16T20:07:01.920" v="20"/>
-        <pc:sldMkLst>
-          <pc:docMk/>
-          <pc:sldMk cId="0" sldId="1449"/>
-        </pc:sldMkLst>
-      </pc:sldChg>
-      <pc:sldChg chg="add">
-        <pc:chgData name="Lines, Todd" userId="afaf7c3a-e8aa-4568-882a-02ad8f9e19b0" providerId="ADAL" clId="{8AD79B72-DC24-4454-A23F-1B1CC88EE569}" dt="2025-05-16T20:07:01.920" v="20"/>
-        <pc:sldMkLst>
-          <pc:docMk/>
-          <pc:sldMk cId="0" sldId="1450"/>
-        </pc:sldMkLst>
-      </pc:sldChg>
-      <pc:sldChg chg="add">
-        <pc:chgData name="Lines, Todd" userId="afaf7c3a-e8aa-4568-882a-02ad8f9e19b0" providerId="ADAL" clId="{8AD79B72-DC24-4454-A23F-1B1CC88EE569}" dt="2025-05-16T20:07:01.920" v="20"/>
-        <pc:sldMkLst>
-          <pc:docMk/>
-          <pc:sldMk cId="1288970717" sldId="1451"/>
-        </pc:sldMkLst>
-      </pc:sldChg>
-      <pc:sldChg chg="add">
-        <pc:chgData name="Lines, Todd" userId="afaf7c3a-e8aa-4568-882a-02ad8f9e19b0" providerId="ADAL" clId="{8AD79B72-DC24-4454-A23F-1B1CC88EE569}" dt="2025-05-16T20:07:01.920" v="20"/>
-        <pc:sldMkLst>
-          <pc:docMk/>
-          <pc:sldMk cId="0" sldId="1452"/>
-        </pc:sldMkLst>
-      </pc:sldChg>
-      <pc:sldChg chg="add">
-        <pc:chgData name="Lines, Todd" userId="afaf7c3a-e8aa-4568-882a-02ad8f9e19b0" providerId="ADAL" clId="{8AD79B72-DC24-4454-A23F-1B1CC88EE569}" dt="2025-05-16T20:07:01.920" v="20"/>
-        <pc:sldMkLst>
-          <pc:docMk/>
-          <pc:sldMk cId="2729245247" sldId="1453"/>
-        </pc:sldMkLst>
-      </pc:sldChg>
-      <pc:sldChg chg="add">
-        <pc:chgData name="Lines, Todd" userId="afaf7c3a-e8aa-4568-882a-02ad8f9e19b0" providerId="ADAL" clId="{8AD79B72-DC24-4454-A23F-1B1CC88EE569}" dt="2025-05-16T20:07:01.920" v="20"/>
-        <pc:sldMkLst>
-          <pc:docMk/>
-          <pc:sldMk cId="0" sldId="1454"/>
-        </pc:sldMkLst>
-      </pc:sldChg>
-      <pc:sldChg chg="add">
-        <pc:chgData name="Lines, Todd" userId="afaf7c3a-e8aa-4568-882a-02ad8f9e19b0" providerId="ADAL" clId="{8AD79B72-DC24-4454-A23F-1B1CC88EE569}" dt="2025-05-16T20:07:01.920" v="20"/>
-        <pc:sldMkLst>
-          <pc:docMk/>
-          <pc:sldMk cId="1483167745" sldId="1455"/>
-        </pc:sldMkLst>
-      </pc:sldChg>
-      <pc:sldChg chg="add">
-        <pc:chgData name="Lines, Todd" userId="afaf7c3a-e8aa-4568-882a-02ad8f9e19b0" providerId="ADAL" clId="{8AD79B72-DC24-4454-A23F-1B1CC88EE569}" dt="2025-05-16T20:07:01.920" v="20"/>
-        <pc:sldMkLst>
-          <pc:docMk/>
-          <pc:sldMk cId="0" sldId="1456"/>
-        </pc:sldMkLst>
-      </pc:sldChg>
-      <pc:sldChg chg="add">
-        <pc:chgData name="Lines, Todd" userId="afaf7c3a-e8aa-4568-882a-02ad8f9e19b0" providerId="ADAL" clId="{8AD79B72-DC24-4454-A23F-1B1CC88EE569}" dt="2025-05-16T20:07:01.920" v="20"/>
-        <pc:sldMkLst>
-          <pc:docMk/>
-          <pc:sldMk cId="0" sldId="1457"/>
-        </pc:sldMkLst>
-      </pc:sldChg>
-      <pc:sldChg chg="add ord">
-        <pc:chgData name="Lines, Todd" userId="afaf7c3a-e8aa-4568-882a-02ad8f9e19b0" providerId="ADAL" clId="{8AD79B72-DC24-4454-A23F-1B1CC88EE569}" dt="2025-05-16T20:10:54.319" v="24"/>
-        <pc:sldMkLst>
-          <pc:docMk/>
-          <pc:sldMk cId="0" sldId="1458"/>
-        </pc:sldMkLst>
-      </pc:sldChg>
-      <pc:sldChg chg="add">
-        <pc:chgData name="Lines, Todd" userId="afaf7c3a-e8aa-4568-882a-02ad8f9e19b0" providerId="ADAL" clId="{8AD79B72-DC24-4454-A23F-1B1CC88EE569}" dt="2025-05-16T20:07:01.920" v="20"/>
-        <pc:sldMkLst>
-          <pc:docMk/>
-          <pc:sldMk cId="0" sldId="1459"/>
-        </pc:sldMkLst>
-      </pc:sldChg>
-      <pc:sldChg chg="add ord">
-        <pc:chgData name="Lines, Todd" userId="afaf7c3a-e8aa-4568-882a-02ad8f9e19b0" providerId="ADAL" clId="{8AD79B72-DC24-4454-A23F-1B1CC88EE569}" dt="2025-05-16T20:11:19.212" v="28"/>
-        <pc:sldMkLst>
-          <pc:docMk/>
-          <pc:sldMk cId="0" sldId="1460"/>
-        </pc:sldMkLst>
-      </pc:sldChg>
-      <pc:sldChg chg="add">
-        <pc:chgData name="Lines, Todd" userId="afaf7c3a-e8aa-4568-882a-02ad8f9e19b0" providerId="ADAL" clId="{8AD79B72-DC24-4454-A23F-1B1CC88EE569}" dt="2025-05-16T20:07:01.920" v="20"/>
-        <pc:sldMkLst>
-          <pc:docMk/>
-          <pc:sldMk cId="0" sldId="1461"/>
-        </pc:sldMkLst>
-      </pc:sldChg>
-      <pc:sldChg chg="add">
-        <pc:chgData name="Lines, Todd" userId="afaf7c3a-e8aa-4568-882a-02ad8f9e19b0" providerId="ADAL" clId="{8AD79B72-DC24-4454-A23F-1B1CC88EE569}" dt="2025-05-16T20:07:01.920" v="20"/>
-        <pc:sldMkLst>
-          <pc:docMk/>
-          <pc:sldMk cId="0" sldId="1462"/>
-        </pc:sldMkLst>
-      </pc:sldChg>
-      <pc:sldChg chg="addSp delSp modSp add mod">
-        <pc:chgData name="Lines, Todd" userId="afaf7c3a-e8aa-4568-882a-02ad8f9e19b0" providerId="ADAL" clId="{8AD79B72-DC24-4454-A23F-1B1CC88EE569}" dt="2025-05-16T20:15:16.048" v="49" actId="21"/>
-        <pc:sldMkLst>
-          <pc:docMk/>
-          <pc:sldMk cId="2814409499" sldId="1463"/>
-        </pc:sldMkLst>
-        <pc:spChg chg="add mod">
-          <ac:chgData name="Lines, Todd" userId="afaf7c3a-e8aa-4568-882a-02ad8f9e19b0" providerId="ADAL" clId="{8AD79B72-DC24-4454-A23F-1B1CC88EE569}" dt="2025-05-16T20:14:53.761" v="43" actId="1076"/>
-          <ac:spMkLst>
-            <pc:docMk/>
-            <pc:sldMk cId="2814409499" sldId="1463"/>
-            <ac:spMk id="4" creationId="{D3D5B4DC-0001-DAB3-3465-4739499AF272}"/>
-          </ac:spMkLst>
-        </pc:spChg>
-        <pc:spChg chg="add mod">
-          <ac:chgData name="Lines, Todd" userId="afaf7c3a-e8aa-4568-882a-02ad8f9e19b0" providerId="ADAL" clId="{8AD79B72-DC24-4454-A23F-1B1CC88EE569}" dt="2025-05-16T20:15:00.824" v="47" actId="20577"/>
-          <ac:spMkLst>
-            <pc:docMk/>
-            <pc:sldMk cId="2814409499" sldId="1463"/>
-            <ac:spMk id="6" creationId="{8AF990E8-5AF1-B131-456D-C511A679506D}"/>
-          </ac:spMkLst>
-        </pc:spChg>
-        <pc:picChg chg="mod">
-          <ac:chgData name="Lines, Todd" userId="afaf7c3a-e8aa-4568-882a-02ad8f9e19b0" providerId="ADAL" clId="{8AD79B72-DC24-4454-A23F-1B1CC88EE569}" dt="2025-05-16T20:13:57.539" v="31" actId="1076"/>
-          <ac:picMkLst>
-            <pc:docMk/>
-            <pc:sldMk cId="2814409499" sldId="1463"/>
-            <ac:picMk id="5" creationId="{74AECC15-237C-F05C-1AB9-A1A76CCBEB3C}"/>
-          </ac:picMkLst>
-        </pc:picChg>
-      </pc:sldChg>
-      <pc:sldChg chg="add">
-        <pc:chgData name="Lines, Todd" userId="afaf7c3a-e8aa-4568-882a-02ad8f9e19b0" providerId="ADAL" clId="{8AD79B72-DC24-4454-A23F-1B1CC88EE569}" dt="2025-05-16T20:07:01.920" v="20"/>
-        <pc:sldMkLst>
-          <pc:docMk/>
-          <pc:sldMk cId="246097883" sldId="1464"/>
-        </pc:sldMkLst>
-      </pc:sldChg>
-      <pc:sldChg chg="add">
-        <pc:chgData name="Lines, Todd" userId="afaf7c3a-e8aa-4568-882a-02ad8f9e19b0" providerId="ADAL" clId="{8AD79B72-DC24-4454-A23F-1B1CC88EE569}" dt="2025-05-16T20:07:01.920" v="20"/>
-        <pc:sldMkLst>
-          <pc:docMk/>
-          <pc:sldMk cId="4222405374" sldId="1465"/>
-        </pc:sldMkLst>
-      </pc:sldChg>
-      <pc:sldChg chg="add">
-        <pc:chgData name="Lines, Todd" userId="afaf7c3a-e8aa-4568-882a-02ad8f9e19b0" providerId="ADAL" clId="{8AD79B72-DC24-4454-A23F-1B1CC88EE569}" dt="2025-05-16T20:07:01.920" v="20"/>
-        <pc:sldMkLst>
-          <pc:docMk/>
-          <pc:sldMk cId="1883198630" sldId="1466"/>
-        </pc:sldMkLst>
-      </pc:sldChg>
-      <pc:sldChg chg="addSp modSp add mod">
-        <pc:chgData name="Lines, Todd" userId="afaf7c3a-e8aa-4568-882a-02ad8f9e19b0" providerId="ADAL" clId="{8AD79B72-DC24-4454-A23F-1B1CC88EE569}" dt="2025-05-16T20:35:28.737" v="53" actId="1035"/>
-        <pc:sldMkLst>
-          <pc:docMk/>
-          <pc:sldMk cId="1248835634" sldId="1467"/>
-        </pc:sldMkLst>
-        <pc:spChg chg="add mod">
-          <ac:chgData name="Lines, Todd" userId="afaf7c3a-e8aa-4568-882a-02ad8f9e19b0" providerId="ADAL" clId="{8AD79B72-DC24-4454-A23F-1B1CC88EE569}" dt="2025-05-16T20:35:23.668" v="51" actId="1076"/>
-          <ac:spMkLst>
-            <pc:docMk/>
-            <pc:sldMk cId="1248835634" sldId="1467"/>
-            <ac:spMk id="2" creationId="{11F8FF1B-5CC3-ABA8-8D5E-F122D078A5A6}"/>
-          </ac:spMkLst>
-        </pc:spChg>
-        <pc:spChg chg="add mod">
-          <ac:chgData name="Lines, Todd" userId="afaf7c3a-e8aa-4568-882a-02ad8f9e19b0" providerId="ADAL" clId="{8AD79B72-DC24-4454-A23F-1B1CC88EE569}" dt="2025-05-16T20:35:28.737" v="53" actId="1035"/>
-          <ac:spMkLst>
-            <pc:docMk/>
-            <pc:sldMk cId="1248835634" sldId="1467"/>
-            <ac:spMk id="3" creationId="{F7D1A200-640E-3069-F3ED-7E08EFC17E25}"/>
-          </ac:spMkLst>
-        </pc:spChg>
-        <pc:picChg chg="mod">
-          <ac:chgData name="Lines, Todd" userId="afaf7c3a-e8aa-4568-882a-02ad8f9e19b0" providerId="ADAL" clId="{8AD79B72-DC24-4454-A23F-1B1CC88EE569}" dt="2025-05-16T20:14:07.838" v="33" actId="1076"/>
-          <ac:picMkLst>
-            <pc:docMk/>
-            <pc:sldMk cId="1248835634" sldId="1467"/>
-            <ac:picMk id="16386" creationId="{00000000-0000-0000-0000-000000000000}"/>
-          </ac:picMkLst>
-        </pc:picChg>
-      </pc:sldChg>
-      <pc:sldChg chg="add">
-        <pc:chgData name="Lines, Todd" userId="afaf7c3a-e8aa-4568-882a-02ad8f9e19b0" providerId="ADAL" clId="{8AD79B72-DC24-4454-A23F-1B1CC88EE569}" dt="2025-05-16T20:07:01.920" v="20"/>
-        <pc:sldMkLst>
-          <pc:docMk/>
-          <pc:sldMk cId="3962036119" sldId="1468"/>
-        </pc:sldMkLst>
-      </pc:sldChg>
-      <pc:sldChg chg="add">
-        <pc:chgData name="Lines, Todd" userId="afaf7c3a-e8aa-4568-882a-02ad8f9e19b0" providerId="ADAL" clId="{8AD79B72-DC24-4454-A23F-1B1CC88EE569}" dt="2025-05-16T20:07:01.920" v="20"/>
-        <pc:sldMkLst>
-          <pc:docMk/>
-          <pc:sldMk cId="2552020055" sldId="1469"/>
-        </pc:sldMkLst>
-      </pc:sldChg>
-      <pc:sldChg chg="add">
-        <pc:chgData name="Lines, Todd" userId="afaf7c3a-e8aa-4568-882a-02ad8f9e19b0" providerId="ADAL" clId="{8AD79B72-DC24-4454-A23F-1B1CC88EE569}" dt="2025-05-16T20:07:01.920" v="20"/>
-        <pc:sldMkLst>
-          <pc:docMk/>
-          <pc:sldMk cId="1933440919" sldId="1470"/>
-        </pc:sldMkLst>
-      </pc:sldChg>
-      <pc:sldChg chg="addSp delSp modSp add mod">
-        <pc:chgData name="Lines, Todd" userId="afaf7c3a-e8aa-4568-882a-02ad8f9e19b0" providerId="ADAL" clId="{8AD79B72-DC24-4454-A23F-1B1CC88EE569}" dt="2025-05-16T20:37:03.693" v="64" actId="21"/>
-        <pc:sldMkLst>
-          <pc:docMk/>
-          <pc:sldMk cId="4000077310" sldId="1471"/>
-        </pc:sldMkLst>
-        <pc:spChg chg="add mod">
-          <ac:chgData name="Lines, Todd" userId="afaf7c3a-e8aa-4568-882a-02ad8f9e19b0" providerId="ADAL" clId="{8AD79B72-DC24-4454-A23F-1B1CC88EE569}" dt="2025-05-16T20:36:14.596" v="60" actId="1076"/>
-          <ac:spMkLst>
-            <pc:docMk/>
-            <pc:sldMk cId="4000077310" sldId="1471"/>
-            <ac:spMk id="2" creationId="{78D98D6C-513A-B665-8750-47F151E6A283}"/>
-          </ac:spMkLst>
-        </pc:spChg>
-        <pc:spChg chg="add mod">
-          <ac:chgData name="Lines, Todd" userId="afaf7c3a-e8aa-4568-882a-02ad8f9e19b0" providerId="ADAL" clId="{8AD79B72-DC24-4454-A23F-1B1CC88EE569}" dt="2025-05-16T20:36:19.201" v="61" actId="1076"/>
-          <ac:spMkLst>
-            <pc:docMk/>
-            <pc:sldMk cId="4000077310" sldId="1471"/>
-            <ac:spMk id="3" creationId="{E2799902-FC80-53BD-0C53-FDEC84419C33}"/>
-          </ac:spMkLst>
-        </pc:spChg>
-      </pc:sldChg>
-      <pc:sldChg chg="add">
-        <pc:chgData name="Lines, Todd" userId="afaf7c3a-e8aa-4568-882a-02ad8f9e19b0" providerId="ADAL" clId="{8AD79B72-DC24-4454-A23F-1B1CC88EE569}" dt="2025-05-16T20:07:01.920" v="20"/>
-        <pc:sldMkLst>
-          <pc:docMk/>
-          <pc:sldMk cId="3300759367" sldId="1472"/>
-        </pc:sldMkLst>
-      </pc:sldChg>
-      <pc:sldChg chg="addSp delSp modSp new mod">
-        <pc:chgData name="Lines, Todd" userId="afaf7c3a-e8aa-4568-882a-02ad8f9e19b0" providerId="ADAL" clId="{8AD79B72-DC24-4454-A23F-1B1CC88EE569}" dt="2025-05-19T18:50:58.423" v="82" actId="21"/>
-        <pc:sldMkLst>
-          <pc:docMk/>
-          <pc:sldMk cId="1064234972" sldId="1473"/>
-        </pc:sldMkLst>
-        <pc:spChg chg="del">
-          <ac:chgData name="Lines, Todd" userId="afaf7c3a-e8aa-4568-882a-02ad8f9e19b0" providerId="ADAL" clId="{8AD79B72-DC24-4454-A23F-1B1CC88EE569}" dt="2025-05-19T18:27:50.563" v="74" actId="478"/>
-          <ac:spMkLst>
-            <pc:docMk/>
-            <pc:sldMk cId="1064234972" sldId="1473"/>
-            <ac:spMk id="3" creationId="{2546DB60-2EBA-113D-7A7C-37893C85108A}"/>
-          </ac:spMkLst>
-        </pc:spChg>
-        <pc:spChg chg="del">
-          <ac:chgData name="Lines, Todd" userId="afaf7c3a-e8aa-4568-882a-02ad8f9e19b0" providerId="ADAL" clId="{8AD79B72-DC24-4454-A23F-1B1CC88EE569}" dt="2025-05-19T18:27:46.494" v="71"/>
-          <ac:spMkLst>
-            <pc:docMk/>
-            <pc:sldMk cId="1064234972" sldId="1473"/>
-            <ac:spMk id="4" creationId="{32CBE20F-2CAB-A8D0-C637-70256580D4CD}"/>
-          </ac:spMkLst>
-        </pc:spChg>
-        <pc:spChg chg="add mod">
-          <ac:chgData name="Lines, Todd" userId="afaf7c3a-e8aa-4568-882a-02ad8f9e19b0" providerId="ADAL" clId="{8AD79B72-DC24-4454-A23F-1B1CC88EE569}" dt="2025-05-19T18:50:39.361" v="79" actId="478"/>
-          <ac:spMkLst>
-            <pc:docMk/>
-            <pc:sldMk cId="1064234972" sldId="1473"/>
-            <ac:spMk id="9" creationId="{EB3ED8B3-8AFB-7DE1-3BC3-9E2EA9700DF6}"/>
-          </ac:spMkLst>
-        </pc:spChg>
-        <pc:picChg chg="add del mod">
-          <ac:chgData name="Lines, Todd" userId="afaf7c3a-e8aa-4568-882a-02ad8f9e19b0" providerId="ADAL" clId="{8AD79B72-DC24-4454-A23F-1B1CC88EE569}" dt="2025-05-19T18:50:39.361" v="79" actId="478"/>
-          <ac:picMkLst>
-            <pc:docMk/>
-            <pc:sldMk cId="1064234972" sldId="1473"/>
-            <ac:picMk id="6" creationId="{6CD7D9EC-3E5A-1E52-3FF4-99BE8246D6BA}"/>
-          </ac:picMkLst>
-        </pc:picChg>
-        <pc:picChg chg="del mod">
-          <ac:chgData name="Lines, Todd" userId="afaf7c3a-e8aa-4568-882a-02ad8f9e19b0" providerId="ADAL" clId="{8AD79B72-DC24-4454-A23F-1B1CC88EE569}" dt="2025-05-19T18:28:22.480" v="78" actId="21"/>
-          <ac:picMkLst>
-            <pc:docMk/>
-            <pc:sldMk cId="1064234972" sldId="1473"/>
-            <ac:picMk id="7" creationId="{2AFD32B1-0BE0-667B-1A90-71A7EDA23AA4}"/>
-          </ac:picMkLst>
-        </pc:picChg>
-        <pc:picChg chg="add mod">
-          <ac:chgData name="Lines, Todd" userId="afaf7c3a-e8aa-4568-882a-02ad8f9e19b0" providerId="ADAL" clId="{8AD79B72-DC24-4454-A23F-1B1CC88EE569}" dt="2025-05-19T18:50:39.813" v="80"/>
-          <ac:picMkLst>
-            <pc:docMk/>
-            <pc:sldMk cId="1064234972" sldId="1473"/>
-            <ac:picMk id="10" creationId="{2384ACB5-6F86-FEE3-9442-D824D5EE5AF6}"/>
-          </ac:picMkLst>
-        </pc:picChg>
-        <pc:picChg chg="del mod">
-          <ac:chgData name="Lines, Todd" userId="afaf7c3a-e8aa-4568-882a-02ad8f9e19b0" providerId="ADAL" clId="{8AD79B72-DC24-4454-A23F-1B1CC88EE569}" dt="2025-05-19T18:50:58.423" v="82" actId="21"/>
-          <ac:picMkLst>
-            <pc:docMk/>
-            <pc:sldMk cId="1064234972" sldId="1473"/>
-            <ac:picMk id="11" creationId="{17D7876D-9AC1-0064-4290-9825ADB96650}"/>
-          </ac:picMkLst>
-        </pc:picChg>
-      </pc:sldChg>
-      <pc:sldChg chg="addSp delSp modSp new mod">
-        <pc:chgData name="Lines, Todd" userId="afaf7c3a-e8aa-4568-882a-02ad8f9e19b0" providerId="ADAL" clId="{8AD79B72-DC24-4454-A23F-1B1CC88EE569}" dt="2025-05-19T19:19:01.887" v="88" actId="1076"/>
+        <pc:chgData name="Lines, Todd" userId="afaf7c3a-e8aa-4568-882a-02ad8f9e19b0" providerId="ADAL" clId="{5FF5AC1B-ABA9-43D7-A1E3-2D92732CD6E2}" dt="2026-05-18T17:38:20.818" v="3" actId="1076"/>
         <pc:sldMkLst>
           <pc:docMk/>
           <pc:sldMk cId="2823382648" sldId="1474"/>
         </pc:sldMkLst>
-        <pc:spChg chg="add del">
-          <ac:chgData name="Lines, Todd" userId="afaf7c3a-e8aa-4568-882a-02ad8f9e19b0" providerId="ADAL" clId="{8AD79B72-DC24-4454-A23F-1B1CC88EE569}" dt="2025-05-19T19:18:52.386" v="85" actId="22"/>
-          <ac:spMkLst>
-            <pc:docMk/>
-            <pc:sldMk cId="2823382648" sldId="1474"/>
-            <ac:spMk id="5" creationId="{0F414C68-B4FE-A5EF-C89F-081ABF86CCD1}"/>
-          </ac:spMkLst>
-        </pc:spChg>
-        <pc:picChg chg="add mod">
-          <ac:chgData name="Lines, Todd" userId="afaf7c3a-e8aa-4568-882a-02ad8f9e19b0" providerId="ADAL" clId="{8AD79B72-DC24-4454-A23F-1B1CC88EE569}" dt="2025-05-19T19:19:01.887" v="88" actId="1076"/>
+        <pc:picChg chg="mod">
+          <ac:chgData name="Lines, Todd" userId="afaf7c3a-e8aa-4568-882a-02ad8f9e19b0" providerId="ADAL" clId="{5FF5AC1B-ABA9-43D7-A1E3-2D92732CD6E2}" dt="2026-05-18T17:38:20.818" v="3" actId="1076"/>
           <ac:picMkLst>
             <pc:docMk/>
             <pc:sldMk cId="2823382648" sldId="1474"/>
@@ -1265,36 +205,53 @@
           </ac:picMkLst>
         </pc:picChg>
       </pc:sldChg>
-      <pc:sldChg chg="addSp modSp new mod">
-        <pc:chgData name="Lines, Todd" userId="afaf7c3a-e8aa-4568-882a-02ad8f9e19b0" providerId="ADAL" clId="{8AD79B72-DC24-4454-A23F-1B1CC88EE569}" dt="2025-05-19T19:19:15.303" v="92" actId="14100"/>
+      <pc:sldChg chg="addSp delSp modSp new mod">
+        <pc:chgData name="Lines, Todd" userId="afaf7c3a-e8aa-4568-882a-02ad8f9e19b0" providerId="ADAL" clId="{5FF5AC1B-ABA9-43D7-A1E3-2D92732CD6E2}" dt="2026-05-18T17:39:34.048" v="22" actId="1076"/>
         <pc:sldMkLst>
           <pc:docMk/>
-          <pc:sldMk cId="2009052920" sldId="1475"/>
+          <pc:sldMk cId="346459859" sldId="1476"/>
         </pc:sldMkLst>
-        <pc:picChg chg="add mod">
-          <ac:chgData name="Lines, Todd" userId="afaf7c3a-e8aa-4568-882a-02ad8f9e19b0" providerId="ADAL" clId="{8AD79B72-DC24-4454-A23F-1B1CC88EE569}" dt="2025-05-19T19:19:15.303" v="92" actId="14100"/>
-          <ac:picMkLst>
+        <pc:spChg chg="del">
+          <ac:chgData name="Lines, Todd" userId="afaf7c3a-e8aa-4568-882a-02ad8f9e19b0" providerId="ADAL" clId="{5FF5AC1B-ABA9-43D7-A1E3-2D92732CD6E2}" dt="2026-05-18T17:38:34.807" v="5" actId="478"/>
+          <ac:spMkLst>
             <pc:docMk/>
-            <pc:sldMk cId="2009052920" sldId="1475"/>
-            <ac:picMk id="5" creationId="{3B6F9F14-E15A-DEF4-CAF5-626C25743820}"/>
-          </ac:picMkLst>
-        </pc:picChg>
+            <pc:sldMk cId="346459859" sldId="1476"/>
+            <ac:spMk id="2" creationId="{BC8993B4-713A-D908-9C2E-B2A1B1ED1437}"/>
+          </ac:spMkLst>
+        </pc:spChg>
+        <pc:spChg chg="del">
+          <ac:chgData name="Lines, Todd" userId="afaf7c3a-e8aa-4568-882a-02ad8f9e19b0" providerId="ADAL" clId="{5FF5AC1B-ABA9-43D7-A1E3-2D92732CD6E2}" dt="2026-05-18T17:38:34.807" v="5" actId="478"/>
+          <ac:spMkLst>
+            <pc:docMk/>
+            <pc:sldMk cId="346459859" sldId="1476"/>
+            <ac:spMk id="3" creationId="{DF7FB268-CB1D-DCE9-52F2-1FAC8EE27F84}"/>
+          </ac:spMkLst>
+        </pc:spChg>
+        <pc:spChg chg="add mod">
+          <ac:chgData name="Lines, Todd" userId="afaf7c3a-e8aa-4568-882a-02ad8f9e19b0" providerId="ADAL" clId="{5FF5AC1B-ABA9-43D7-A1E3-2D92732CD6E2}" dt="2026-05-18T17:39:00.343" v="12" actId="13822"/>
+          <ac:spMkLst>
+            <pc:docMk/>
+            <pc:sldMk cId="346459859" sldId="1476"/>
+            <ac:spMk id="4" creationId="{0204954E-5CDA-1E37-5CC9-7009548E11E8}"/>
+          </ac:spMkLst>
+        </pc:spChg>
+        <pc:spChg chg="add mod">
+          <ac:chgData name="Lines, Todd" userId="afaf7c3a-e8aa-4568-882a-02ad8f9e19b0" providerId="ADAL" clId="{5FF5AC1B-ABA9-43D7-A1E3-2D92732CD6E2}" dt="2026-05-18T17:39:31.226" v="21" actId="14100"/>
+          <ac:spMkLst>
+            <pc:docMk/>
+            <pc:sldMk cId="346459859" sldId="1476"/>
+            <ac:spMk id="5" creationId="{362A5427-96AC-C020-2482-0E5993FDB296}"/>
+          </ac:spMkLst>
+        </pc:spChg>
+        <pc:spChg chg="add mod">
+          <ac:chgData name="Lines, Todd" userId="afaf7c3a-e8aa-4568-882a-02ad8f9e19b0" providerId="ADAL" clId="{5FF5AC1B-ABA9-43D7-A1E3-2D92732CD6E2}" dt="2026-05-18T17:39:34.048" v="22" actId="1076"/>
+          <ac:spMkLst>
+            <pc:docMk/>
+            <pc:sldMk cId="346459859" sldId="1476"/>
+            <ac:spMk id="6" creationId="{AF386CED-85DC-FD47-CC0F-51E89E2F82BD}"/>
+          </ac:spMkLst>
+        </pc:spChg>
       </pc:sldChg>
-      <pc:sldMasterChg chg="delSldLayout">
-        <pc:chgData name="Lines, Todd" userId="afaf7c3a-e8aa-4568-882a-02ad8f9e19b0" providerId="ADAL" clId="{8AD79B72-DC24-4454-A23F-1B1CC88EE569}" dt="2025-05-16T19:59:20.116" v="3" actId="47"/>
-        <pc:sldMasterMkLst>
-          <pc:docMk/>
-          <pc:sldMasterMk cId="0" sldId="2147483648"/>
-        </pc:sldMasterMkLst>
-        <pc:sldLayoutChg chg="del">
-          <pc:chgData name="Lines, Todd" userId="afaf7c3a-e8aa-4568-882a-02ad8f9e19b0" providerId="ADAL" clId="{8AD79B72-DC24-4454-A23F-1B1CC88EE569}" dt="2025-05-16T19:59:20.116" v="3" actId="47"/>
-          <pc:sldLayoutMkLst>
-            <pc:docMk/>
-            <pc:sldMasterMk cId="0" sldId="2147483648"/>
-            <pc:sldLayoutMk cId="374124168" sldId="2147483660"/>
-          </pc:sldLayoutMkLst>
-        </pc:sldLayoutChg>
-      </pc:sldMasterChg>
     </pc:docChg>
   </pc:docChgLst>
 </pc:chgInfo>
@@ -1382,7 +339,7 @@
           <a:p>
             <a:fld id="{E88EA6F3-D16B-43CF-8FE6-1FF4D2BFA12B}" type="datetimeFigureOut">
               <a:rPr lang="en-US" smtClean="0"/>
-              <a:t>5/19/2025</a:t>
+              <a:t>5/18/2026</a:t>
             </a:fld>
             <a:endParaRPr lang="en-US"/>
           </a:p>
@@ -1967,7 +924,7 @@
             <a:fld id="{073F8353-DA18-4A0E-B89B-B4051FD74AAE}" type="slidenum">
               <a:rPr lang="en-US" smtClean="0"/>
               <a:pPr/>
-              <a:t>42</a:t>
+              <a:t>43</a:t>
             </a:fld>
             <a:endParaRPr lang="en-US"/>
           </a:p>
@@ -2052,7 +1009,7 @@
             <a:fld id="{073F8353-DA18-4A0E-B89B-B4051FD74AAE}" type="slidenum">
               <a:rPr lang="en-US" smtClean="0"/>
               <a:pPr/>
-              <a:t>44</a:t>
+              <a:t>45</a:t>
             </a:fld>
             <a:endParaRPr lang="en-US"/>
           </a:p>
@@ -2250,7 +1207,7 @@
           <a:p>
             <a:fld id="{25987319-CB3A-446C-8A3F-98E20AC16BB9}" type="datetimeFigureOut">
               <a:rPr lang="en-US" smtClean="0"/>
-              <a:t>5/19/2025</a:t>
+              <a:t>5/18/2026</a:t>
             </a:fld>
             <a:endParaRPr lang="en-US"/>
           </a:p>
@@ -2413,7 +1370,7 @@
           <a:p>
             <a:fld id="{25987319-CB3A-446C-8A3F-98E20AC16BB9}" type="datetimeFigureOut">
               <a:rPr lang="en-US" smtClean="0"/>
-              <a:t>5/19/2025</a:t>
+              <a:t>5/18/2026</a:t>
             </a:fld>
             <a:endParaRPr lang="en-US"/>
           </a:p>
@@ -2586,7 +1543,7 @@
           <a:p>
             <a:fld id="{25987319-CB3A-446C-8A3F-98E20AC16BB9}" type="datetimeFigureOut">
               <a:rPr lang="en-US" smtClean="0"/>
-              <a:t>5/19/2025</a:t>
+              <a:t>5/18/2026</a:t>
             </a:fld>
             <a:endParaRPr lang="en-US"/>
           </a:p>
@@ -2981,7 +1938,7 @@
           <a:p>
             <a:fld id="{25987319-CB3A-446C-8A3F-98E20AC16BB9}" type="datetimeFigureOut">
               <a:rPr lang="en-US" smtClean="0"/>
-              <a:t>5/19/2025</a:t>
+              <a:t>5/18/2026</a:t>
             </a:fld>
             <a:endParaRPr lang="en-US"/>
           </a:p>
@@ -3221,7 +2178,7 @@
           <a:p>
             <a:fld id="{25987319-CB3A-446C-8A3F-98E20AC16BB9}" type="datetimeFigureOut">
               <a:rPr lang="en-US" smtClean="0"/>
-              <a:t>5/19/2025</a:t>
+              <a:t>5/18/2026</a:t>
             </a:fld>
             <a:endParaRPr lang="en-US"/>
           </a:p>
@@ -3501,7 +2458,7 @@
           <a:p>
             <a:fld id="{25987319-CB3A-446C-8A3F-98E20AC16BB9}" type="datetimeFigureOut">
               <a:rPr lang="en-US" smtClean="0"/>
-              <a:t>5/19/2025</a:t>
+              <a:t>5/18/2026</a:t>
             </a:fld>
             <a:endParaRPr lang="en-US"/>
           </a:p>
@@ -3915,7 +2872,7 @@
           <a:p>
             <a:fld id="{25987319-CB3A-446C-8A3F-98E20AC16BB9}" type="datetimeFigureOut">
               <a:rPr lang="en-US" smtClean="0"/>
-              <a:t>5/19/2025</a:t>
+              <a:t>5/18/2026</a:t>
             </a:fld>
             <a:endParaRPr lang="en-US"/>
           </a:p>
@@ -4027,7 +2984,7 @@
           <a:p>
             <a:fld id="{25987319-CB3A-446C-8A3F-98E20AC16BB9}" type="datetimeFigureOut">
               <a:rPr lang="en-US" smtClean="0"/>
-              <a:t>5/19/2025</a:t>
+              <a:t>5/18/2026</a:t>
             </a:fld>
             <a:endParaRPr lang="en-US"/>
           </a:p>
@@ -4117,7 +3074,7 @@
           <a:p>
             <a:fld id="{25987319-CB3A-446C-8A3F-98E20AC16BB9}" type="datetimeFigureOut">
               <a:rPr lang="en-US" smtClean="0"/>
-              <a:t>5/19/2025</a:t>
+              <a:t>5/18/2026</a:t>
             </a:fld>
             <a:endParaRPr lang="en-US"/>
           </a:p>
@@ -4387,7 +3344,7 @@
           <a:p>
             <a:fld id="{25987319-CB3A-446C-8A3F-98E20AC16BB9}" type="datetimeFigureOut">
               <a:rPr lang="en-US" smtClean="0"/>
-              <a:t>5/19/2025</a:t>
+              <a:t>5/18/2026</a:t>
             </a:fld>
             <a:endParaRPr lang="en-US"/>
           </a:p>
@@ -4634,7 +3591,7 @@
           <a:p>
             <a:fld id="{25987319-CB3A-446C-8A3F-98E20AC16BB9}" type="datetimeFigureOut">
               <a:rPr lang="en-US" smtClean="0"/>
-              <a:t>5/19/2025</a:t>
+              <a:t>5/18/2026</a:t>
             </a:fld>
             <a:endParaRPr lang="en-US"/>
           </a:p>
@@ -4840,7 +3797,7 @@
           <a:p>
             <a:fld id="{25987319-CB3A-446C-8A3F-98E20AC16BB9}" type="datetimeFigureOut">
               <a:rPr lang="en-US" smtClean="0"/>
-              <a:t>5/19/2025</a:t>
+              <a:t>5/18/2026</a:t>
             </a:fld>
             <a:endParaRPr lang="en-US"/>
           </a:p>
@@ -12790,8 +11747,8 @@
         </p:blipFill>
         <p:spPr>
           <a:xfrm>
-            <a:off x="1639442" y="2121408"/>
-            <a:ext cx="5381625" cy="2286000"/>
+            <a:off x="387404" y="1848103"/>
+            <a:ext cx="8299396" cy="3525407"/>
           </a:xfrm>
           <a:prstGeom prst="rect">
             <a:avLst/>
@@ -12812,6 +11769,174 @@
 </file>
 
 <file path=ppt/slides/slide22.xml><?xml version="1.0" encoding="utf-8"?>
+<p:sld xmlns:a="http://schemas.openxmlformats.org/drawingml/2006/main" xmlns:r="http://schemas.openxmlformats.org/officeDocument/2006/relationships" xmlns:p="http://schemas.openxmlformats.org/presentationml/2006/main">
+  <p:cSld>
+    <p:spTree>
+      <p:nvGrpSpPr>
+        <p:cNvPr id="1" name=""/>
+        <p:cNvGrpSpPr/>
+        <p:nvPr/>
+      </p:nvGrpSpPr>
+      <p:grpSpPr>
+        <a:xfrm>
+          <a:off x="0" y="0"/>
+          <a:ext cx="0" cy="0"/>
+          <a:chOff x="0" y="0"/>
+          <a:chExt cx="0" cy="0"/>
+        </a:xfrm>
+      </p:grpSpPr>
+      <p:sp>
+        <p:nvSpPr>
+          <p:cNvPr id="4" name="Arrow: Up 3">
+            <a:extLst>
+              <a:ext uri="{FF2B5EF4-FFF2-40B4-BE49-F238E27FC236}">
+                <a16:creationId xmlns:a16="http://schemas.microsoft.com/office/drawing/2014/main" id="{0204954E-5CDA-1E37-5CC9-7009548E11E8}"/>
+              </a:ext>
+            </a:extLst>
+          </p:cNvPr>
+          <p:cNvSpPr/>
+          <p:nvPr/>
+        </p:nvSpPr>
+        <p:spPr>
+          <a:xfrm>
+            <a:off x="3448755" y="361244"/>
+            <a:ext cx="2246489" cy="6084712"/>
+          </a:xfrm>
+          <a:prstGeom prst="upArrow">
+            <a:avLst/>
+          </a:prstGeom>
+        </p:spPr>
+        <p:style>
+          <a:lnRef idx="2">
+            <a:schemeClr val="dk1">
+              <a:shade val="15000"/>
+            </a:schemeClr>
+          </a:lnRef>
+          <a:fillRef idx="1">
+            <a:schemeClr val="dk1"/>
+          </a:fillRef>
+          <a:effectRef idx="0">
+            <a:schemeClr val="dk1"/>
+          </a:effectRef>
+          <a:fontRef idx="minor">
+            <a:schemeClr val="lt1"/>
+          </a:fontRef>
+        </p:style>
+        <p:txBody>
+          <a:bodyPr rtlCol="0" anchor="ctr"/>
+          <a:lstStyle/>
+          <a:p>
+            <a:pPr algn="ctr"/>
+            <a:endParaRPr lang="en-US"/>
+          </a:p>
+        </p:txBody>
+      </p:sp>
+      <p:sp>
+        <p:nvSpPr>
+          <p:cNvPr id="5" name="Rectangle 4">
+            <a:extLst>
+              <a:ext uri="{FF2B5EF4-FFF2-40B4-BE49-F238E27FC236}">
+                <a16:creationId xmlns:a16="http://schemas.microsoft.com/office/drawing/2014/main" id="{362A5427-96AC-C020-2482-0E5993FDB296}"/>
+              </a:ext>
+            </a:extLst>
+          </p:cNvPr>
+          <p:cNvSpPr/>
+          <p:nvPr/>
+        </p:nvSpPr>
+        <p:spPr>
+          <a:xfrm>
+            <a:off x="1286933" y="2912534"/>
+            <a:ext cx="6028268" cy="1230489"/>
+          </a:xfrm>
+          <a:prstGeom prst="rect">
+            <a:avLst/>
+          </a:prstGeom>
+        </p:spPr>
+        <p:style>
+          <a:lnRef idx="2">
+            <a:schemeClr val="dk1">
+              <a:shade val="15000"/>
+            </a:schemeClr>
+          </a:lnRef>
+          <a:fillRef idx="1">
+            <a:schemeClr val="dk1"/>
+          </a:fillRef>
+          <a:effectRef idx="0">
+            <a:schemeClr val="dk1"/>
+          </a:effectRef>
+          <a:fontRef idx="minor">
+            <a:schemeClr val="lt1"/>
+          </a:fontRef>
+        </p:style>
+        <p:txBody>
+          <a:bodyPr rtlCol="0" anchor="ctr"/>
+          <a:lstStyle/>
+          <a:p>
+            <a:pPr algn="ctr"/>
+            <a:endParaRPr lang="en-US"/>
+          </a:p>
+        </p:txBody>
+      </p:sp>
+      <p:sp>
+        <p:nvSpPr>
+          <p:cNvPr id="6" name="Oval 5">
+            <a:extLst>
+              <a:ext uri="{FF2B5EF4-FFF2-40B4-BE49-F238E27FC236}">
+                <a16:creationId xmlns:a16="http://schemas.microsoft.com/office/drawing/2014/main" id="{AF386CED-85DC-FD47-CC0F-51E89E2F82BD}"/>
+              </a:ext>
+            </a:extLst>
+          </p:cNvPr>
+          <p:cNvSpPr/>
+          <p:nvPr/>
+        </p:nvSpPr>
+        <p:spPr>
+          <a:xfrm>
+            <a:off x="6508045" y="2483554"/>
+            <a:ext cx="2246489" cy="2223911"/>
+          </a:xfrm>
+          <a:prstGeom prst="ellipse">
+            <a:avLst/>
+          </a:prstGeom>
+        </p:spPr>
+        <p:style>
+          <a:lnRef idx="2">
+            <a:schemeClr val="dk1">
+              <a:shade val="15000"/>
+            </a:schemeClr>
+          </a:lnRef>
+          <a:fillRef idx="1">
+            <a:schemeClr val="dk1"/>
+          </a:fillRef>
+          <a:effectRef idx="0">
+            <a:schemeClr val="dk1"/>
+          </a:effectRef>
+          <a:fontRef idx="minor">
+            <a:schemeClr val="lt1"/>
+          </a:fontRef>
+        </p:style>
+        <p:txBody>
+          <a:bodyPr rtlCol="0" anchor="ctr"/>
+          <a:lstStyle/>
+          <a:p>
+            <a:pPr algn="ctr"/>
+            <a:endParaRPr lang="en-US"/>
+          </a:p>
+        </p:txBody>
+      </p:sp>
+    </p:spTree>
+    <p:extLst>
+      <p:ext uri="{BB962C8B-B14F-4D97-AF65-F5344CB8AC3E}">
+        <p14:creationId xmlns:p14="http://schemas.microsoft.com/office/powerpoint/2010/main" val="346459859"/>
+      </p:ext>
+    </p:extLst>
+  </p:cSld>
+  <p:clrMapOvr>
+    <a:masterClrMapping/>
+  </p:clrMapOvr>
+</p:sld>
+</file>
+
+<file path=ppt/slides/slide23.xml><?xml version="1.0" encoding="utf-8"?>
 <p:sld xmlns:a="http://schemas.openxmlformats.org/drawingml/2006/main" xmlns:r="http://schemas.openxmlformats.org/officeDocument/2006/relationships" xmlns:p="http://schemas.openxmlformats.org/presentationml/2006/main">
   <p:cSld>
     <p:spTree>
@@ -12921,7 +12046,7 @@
 </p:sld>
 </file>
 
-<file path=ppt/slides/slide23.xml><?xml version="1.0" encoding="utf-8"?>
+<file path=ppt/slides/slide24.xml><?xml version="1.0" encoding="utf-8"?>
 <p:sld xmlns:a="http://schemas.openxmlformats.org/drawingml/2006/main" xmlns:r="http://schemas.openxmlformats.org/officeDocument/2006/relationships" xmlns:p="http://schemas.openxmlformats.org/presentationml/2006/main">
   <p:cSld>
     <p:spTree>
@@ -12958,7 +12083,7 @@
             <a:fld id="{67DC12B3-74C2-4E26-B0DA-0EC410BBD4AF}" type="slidenum">
               <a:rPr lang="en-US" smtClean="0"/>
               <a:pPr/>
-              <a:t>23</a:t>
+              <a:t>24</a:t>
             </a:fld>
             <a:endParaRPr lang="en-US"/>
           </a:p>
@@ -13167,156 +12292,6 @@
     <p:extLst>
       <p:ext uri="{BB962C8B-B14F-4D97-AF65-F5344CB8AC3E}">
         <p14:creationId xmlns:p14="http://schemas.microsoft.com/office/powerpoint/2010/main" val="246097883"/>
-      </p:ext>
-    </p:extLst>
-  </p:cSld>
-  <p:clrMapOvr>
-    <a:masterClrMapping/>
-  </p:clrMapOvr>
-</p:sld>
-</file>
-
-<file path=ppt/slides/slide24.xml><?xml version="1.0" encoding="utf-8"?>
-<p:sld xmlns:a="http://schemas.openxmlformats.org/drawingml/2006/main" xmlns:r="http://schemas.openxmlformats.org/officeDocument/2006/relationships" xmlns:p="http://schemas.openxmlformats.org/presentationml/2006/main">
-  <p:cSld>
-    <p:spTree>
-      <p:nvGrpSpPr>
-        <p:cNvPr id="1" name=""/>
-        <p:cNvGrpSpPr/>
-        <p:nvPr/>
-      </p:nvGrpSpPr>
-      <p:grpSpPr>
-        <a:xfrm>
-          <a:off x="0" y="0"/>
-          <a:ext cx="0" cy="0"/>
-          <a:chOff x="0" y="0"/>
-          <a:chExt cx="0" cy="0"/>
-        </a:xfrm>
-      </p:grpSpPr>
-      <p:sp>
-        <p:nvSpPr>
-          <p:cNvPr id="175107" name="Rectangle 2"/>
-          <p:cNvSpPr>
-            <a:spLocks noGrp="1" noChangeArrowheads="1"/>
-          </p:cNvSpPr>
-          <p:nvPr>
-            <p:ph type="title"/>
-          </p:nvPr>
-        </p:nvSpPr>
-        <p:spPr/>
-        <p:txBody>
-          <a:bodyPr/>
-          <a:lstStyle/>
-          <a:p>
-            <a:pPr eaLnBrk="1" hangingPunct="1"/>
-            <a:r>
-              <a:rPr lang="en-US" dirty="0"/>
-              <a:t>Question 223.16.8</a:t>
-            </a:r>
-          </a:p>
-        </p:txBody>
-      </p:sp>
-      <p:sp>
-        <p:nvSpPr>
-          <p:cNvPr id="175108" name="Rectangle 3"/>
-          <p:cNvSpPr>
-            <a:spLocks noGrp="1" noChangeArrowheads="1"/>
-          </p:cNvSpPr>
-          <p:nvPr>
-            <p:ph idx="1"/>
-          </p:nvPr>
-        </p:nvSpPr>
-        <p:spPr/>
-        <p:txBody>
-          <a:bodyPr/>
-          <a:lstStyle/>
-          <a:p>
-            <a:pPr marL="457200" indent="-457200">
-              <a:buNone/>
-            </a:pPr>
-            <a:r>
-              <a:rPr lang="en-US" dirty="0"/>
-              <a:t>Consider a flat mirror. Which of the following is true?</a:t>
-            </a:r>
-          </a:p>
-          <a:p>
-            <a:pPr marL="457200" indent="-457200">
-              <a:buFontTx/>
-              <a:buAutoNum type="alphaLcParenR"/>
-            </a:pPr>
-            <a:r>
-              <a:rPr lang="en-US" sz="1800" dirty="0"/>
-              <a:t>The image is as far behind the mirror as the object is in front</a:t>
-            </a:r>
-          </a:p>
-          <a:p>
-            <a:pPr marL="457200" indent="-457200">
-              <a:buFontTx/>
-              <a:buAutoNum type="alphaLcParenR"/>
-            </a:pPr>
-            <a:r>
-              <a:rPr lang="en-US" sz="1800" dirty="0"/>
-              <a:t>The image is twice as far away as the object is from the mirror</a:t>
-            </a:r>
-          </a:p>
-          <a:p>
-            <a:pPr marL="457200" indent="-457200">
-              <a:buFontTx/>
-              <a:buAutoNum type="alphaLcParenR"/>
-            </a:pPr>
-            <a:r>
-              <a:rPr lang="en-US" sz="1800" dirty="0"/>
-              <a:t>The image is farther away, but you would need to know the particular circumstances to know how far.</a:t>
-            </a:r>
-          </a:p>
-          <a:p>
-            <a:pPr marL="457200" indent="-457200">
-              <a:buFontTx/>
-              <a:buAutoNum type="alphaLcParenR"/>
-            </a:pPr>
-            <a:r>
-              <a:rPr lang="en-US" sz="1800" dirty="0"/>
-              <a:t>The image is in the same place as the object.</a:t>
-            </a:r>
-          </a:p>
-          <a:p>
-            <a:pPr marL="457200" indent="-457200">
-              <a:buNone/>
-            </a:pPr>
-            <a:endParaRPr lang="en-US" sz="1800" dirty="0"/>
-          </a:p>
-        </p:txBody>
-      </p:sp>
-      <p:sp>
-        <p:nvSpPr>
-          <p:cNvPr id="175106" name="Slide Number Placeholder 5"/>
-          <p:cNvSpPr>
-            <a:spLocks noGrp="1"/>
-          </p:cNvSpPr>
-          <p:nvPr>
-            <p:ph type="sldNum" sz="quarter" idx="12"/>
-          </p:nvPr>
-        </p:nvSpPr>
-        <p:spPr>
-          <a:noFill/>
-        </p:spPr>
-        <p:txBody>
-          <a:bodyPr/>
-          <a:lstStyle/>
-          <a:p>
-            <a:fld id="{496F7789-C58F-4CB0-9513-1A65DE68DB2C}" type="slidenum">
-              <a:rPr lang="en-US" smtClean="0"/>
-              <a:pPr/>
-              <a:t>24</a:t>
-            </a:fld>
-            <a:endParaRPr lang="en-US"/>
-          </a:p>
-        </p:txBody>
-      </p:sp>
-    </p:spTree>
-    <p:extLst>
-      <p:ext uri="{BB962C8B-B14F-4D97-AF65-F5344CB8AC3E}">
-        <p14:creationId xmlns:p14="http://schemas.microsoft.com/office/powerpoint/2010/main" val="4222405374"/>
       </p:ext>
     </p:extLst>
   </p:cSld>
@@ -13345,7 +12320,7 @@
       </p:grpSpPr>
       <p:sp>
         <p:nvSpPr>
-          <p:cNvPr id="176131" name="Rectangle 2"/>
+          <p:cNvPr id="175107" name="Rectangle 2"/>
           <p:cNvSpPr>
             <a:spLocks noGrp="1" noChangeArrowheads="1"/>
           </p:cNvSpPr>
@@ -13358,16 +12333,17 @@
           <a:bodyPr/>
           <a:lstStyle/>
           <a:p>
+            <a:pPr eaLnBrk="1" hangingPunct="1"/>
             <a:r>
               <a:rPr lang="en-US" dirty="0"/>
-              <a:t>Question 223.16.9</a:t>
-            </a:r>
-          </a:p>
-        </p:txBody>
-      </p:sp>
-      <p:sp>
-        <p:nvSpPr>
-          <p:cNvPr id="176132" name="Rectangle 3"/>
+              <a:t>Question 223.16.8</a:t>
+            </a:r>
+          </a:p>
+        </p:txBody>
+      </p:sp>
+      <p:sp>
+        <p:nvSpPr>
+          <p:cNvPr id="175108" name="Rectangle 3"/>
           <p:cNvSpPr>
             <a:spLocks noGrp="1" noChangeArrowheads="1"/>
           </p:cNvSpPr>
@@ -13384,8 +12360,8 @@
               <a:buNone/>
             </a:pPr>
             <a:r>
-              <a:rPr lang="en-US"/>
-              <a:t>What is the magnification of a flat mirror</a:t>
+              <a:rPr lang="en-US" dirty="0"/>
+              <a:t>Consider a flat mirror. Which of the following is true?</a:t>
             </a:r>
           </a:p>
           <a:p>
@@ -13394,8 +12370,8 @@
               <a:buAutoNum type="alphaLcParenR"/>
             </a:pPr>
             <a:r>
-              <a:rPr lang="en-US"/>
-              <a:t>1</a:t>
+              <a:rPr lang="en-US" sz="1800" dirty="0"/>
+              <a:t>The image is as far behind the mirror as the object is in front</a:t>
             </a:r>
           </a:p>
           <a:p>
@@ -13404,8 +12380,8 @@
               <a:buAutoNum type="alphaLcParenR"/>
             </a:pPr>
             <a:r>
-              <a:rPr lang="en-US"/>
-              <a:t>2</a:t>
+              <a:rPr lang="en-US" sz="1800" dirty="0"/>
+              <a:t>The image is twice as far away as the object is from the mirror</a:t>
             </a:r>
           </a:p>
           <a:p>
@@ -13414,8 +12390,8 @@
               <a:buAutoNum type="alphaLcParenR"/>
             </a:pPr>
             <a:r>
-              <a:rPr lang="en-US"/>
-              <a:t>-1</a:t>
+              <a:rPr lang="en-US" sz="1800" dirty="0"/>
+              <a:t>The image is farther away, but you would need to know the particular circumstances to know how far.</a:t>
             </a:r>
           </a:p>
           <a:p>
@@ -13424,25 +12400,21 @@
               <a:buAutoNum type="alphaLcParenR"/>
             </a:pPr>
             <a:r>
-              <a:rPr lang="en-US"/>
-              <a:t>½</a:t>
+              <a:rPr lang="en-US" sz="1800" dirty="0"/>
+              <a:t>The image is in the same place as the object.</a:t>
             </a:r>
           </a:p>
           <a:p>
             <a:pPr marL="457200" indent="-457200">
-              <a:buFontTx/>
-              <a:buAutoNum type="alphaLcParenR"/>
+              <a:buNone/>
             </a:pPr>
-            <a:r>
-              <a:rPr lang="en-US"/>
-              <a:t>The image is unmagnified</a:t>
-            </a:r>
-          </a:p>
-        </p:txBody>
-      </p:sp>
-      <p:sp>
-        <p:nvSpPr>
-          <p:cNvPr id="176130" name="Slide Number Placeholder 5"/>
+            <a:endParaRPr lang="en-US" sz="1800" dirty="0"/>
+          </a:p>
+        </p:txBody>
+      </p:sp>
+      <p:sp>
+        <p:nvSpPr>
+          <p:cNvPr id="175106" name="Slide Number Placeholder 5"/>
           <p:cNvSpPr>
             <a:spLocks noGrp="1"/>
           </p:cNvSpPr>
@@ -13457,7 +12429,7 @@
           <a:bodyPr/>
           <a:lstStyle/>
           <a:p>
-            <a:fld id="{9AB5DDE2-0386-413F-92C3-1D873C5EEA07}" type="slidenum">
+            <a:fld id="{496F7789-C58F-4CB0-9513-1A65DE68DB2C}" type="slidenum">
               <a:rPr lang="en-US" smtClean="0"/>
               <a:pPr/>
               <a:t>25</a:t>
@@ -13469,7 +12441,7 @@
     </p:spTree>
     <p:extLst>
       <p:ext uri="{BB962C8B-B14F-4D97-AF65-F5344CB8AC3E}">
-        <p14:creationId xmlns:p14="http://schemas.microsoft.com/office/powerpoint/2010/main" val="2085335207"/>
+        <p14:creationId xmlns:p14="http://schemas.microsoft.com/office/powerpoint/2010/main" val="4222405374"/>
       </p:ext>
     </p:extLst>
   </p:cSld>
@@ -13498,6 +12470,159 @@
       </p:grpSpPr>
       <p:sp>
         <p:nvSpPr>
+          <p:cNvPr id="176131" name="Rectangle 2"/>
+          <p:cNvSpPr>
+            <a:spLocks noGrp="1" noChangeArrowheads="1"/>
+          </p:cNvSpPr>
+          <p:nvPr>
+            <p:ph type="title"/>
+          </p:nvPr>
+        </p:nvSpPr>
+        <p:spPr/>
+        <p:txBody>
+          <a:bodyPr/>
+          <a:lstStyle/>
+          <a:p>
+            <a:r>
+              <a:rPr lang="en-US" dirty="0"/>
+              <a:t>Question 223.16.9</a:t>
+            </a:r>
+          </a:p>
+        </p:txBody>
+      </p:sp>
+      <p:sp>
+        <p:nvSpPr>
+          <p:cNvPr id="176132" name="Rectangle 3"/>
+          <p:cNvSpPr>
+            <a:spLocks noGrp="1" noChangeArrowheads="1"/>
+          </p:cNvSpPr>
+          <p:nvPr>
+            <p:ph idx="1"/>
+          </p:nvPr>
+        </p:nvSpPr>
+        <p:spPr/>
+        <p:txBody>
+          <a:bodyPr/>
+          <a:lstStyle/>
+          <a:p>
+            <a:pPr marL="457200" indent="-457200">
+              <a:buNone/>
+            </a:pPr>
+            <a:r>
+              <a:rPr lang="en-US"/>
+              <a:t>What is the magnification of a flat mirror</a:t>
+            </a:r>
+          </a:p>
+          <a:p>
+            <a:pPr marL="457200" indent="-457200">
+              <a:buFontTx/>
+              <a:buAutoNum type="alphaLcParenR"/>
+            </a:pPr>
+            <a:r>
+              <a:rPr lang="en-US"/>
+              <a:t>1</a:t>
+            </a:r>
+          </a:p>
+          <a:p>
+            <a:pPr marL="457200" indent="-457200">
+              <a:buFontTx/>
+              <a:buAutoNum type="alphaLcParenR"/>
+            </a:pPr>
+            <a:r>
+              <a:rPr lang="en-US"/>
+              <a:t>2</a:t>
+            </a:r>
+          </a:p>
+          <a:p>
+            <a:pPr marL="457200" indent="-457200">
+              <a:buFontTx/>
+              <a:buAutoNum type="alphaLcParenR"/>
+            </a:pPr>
+            <a:r>
+              <a:rPr lang="en-US"/>
+              <a:t>-1</a:t>
+            </a:r>
+          </a:p>
+          <a:p>
+            <a:pPr marL="457200" indent="-457200">
+              <a:buFontTx/>
+              <a:buAutoNum type="alphaLcParenR"/>
+            </a:pPr>
+            <a:r>
+              <a:rPr lang="en-US"/>
+              <a:t>½</a:t>
+            </a:r>
+          </a:p>
+          <a:p>
+            <a:pPr marL="457200" indent="-457200">
+              <a:buFontTx/>
+              <a:buAutoNum type="alphaLcParenR"/>
+            </a:pPr>
+            <a:r>
+              <a:rPr lang="en-US"/>
+              <a:t>The image is unmagnified</a:t>
+            </a:r>
+          </a:p>
+        </p:txBody>
+      </p:sp>
+      <p:sp>
+        <p:nvSpPr>
+          <p:cNvPr id="176130" name="Slide Number Placeholder 5"/>
+          <p:cNvSpPr>
+            <a:spLocks noGrp="1"/>
+          </p:cNvSpPr>
+          <p:nvPr>
+            <p:ph type="sldNum" sz="quarter" idx="12"/>
+          </p:nvPr>
+        </p:nvSpPr>
+        <p:spPr>
+          <a:noFill/>
+        </p:spPr>
+        <p:txBody>
+          <a:bodyPr/>
+          <a:lstStyle/>
+          <a:p>
+            <a:fld id="{9AB5DDE2-0386-413F-92C3-1D873C5EEA07}" type="slidenum">
+              <a:rPr lang="en-US" smtClean="0"/>
+              <a:pPr/>
+              <a:t>26</a:t>
+            </a:fld>
+            <a:endParaRPr lang="en-US"/>
+          </a:p>
+        </p:txBody>
+      </p:sp>
+    </p:spTree>
+    <p:extLst>
+      <p:ext uri="{BB962C8B-B14F-4D97-AF65-F5344CB8AC3E}">
+        <p14:creationId xmlns:p14="http://schemas.microsoft.com/office/powerpoint/2010/main" val="2085335207"/>
+      </p:ext>
+    </p:extLst>
+  </p:cSld>
+  <p:clrMapOvr>
+    <a:masterClrMapping/>
+  </p:clrMapOvr>
+</p:sld>
+</file>
+
+<file path=ppt/slides/slide27.xml><?xml version="1.0" encoding="utf-8"?>
+<p:sld xmlns:a="http://schemas.openxmlformats.org/drawingml/2006/main" xmlns:r="http://schemas.openxmlformats.org/officeDocument/2006/relationships" xmlns:p="http://schemas.openxmlformats.org/presentationml/2006/main">
+  <p:cSld>
+    <p:spTree>
+      <p:nvGrpSpPr>
+        <p:cNvPr id="1" name=""/>
+        <p:cNvGrpSpPr/>
+        <p:nvPr/>
+      </p:nvGrpSpPr>
+      <p:grpSpPr>
+        <a:xfrm>
+          <a:off x="0" y="0"/>
+          <a:ext cx="0" cy="0"/>
+          <a:chOff x="0" y="0"/>
+          <a:chExt cx="0" cy="0"/>
+        </a:xfrm>
+      </p:grpSpPr>
+      <p:sp>
+        <p:nvSpPr>
           <p:cNvPr id="177155" name="Rectangle 2"/>
           <p:cNvSpPr>
             <a:spLocks noGrp="1" noChangeArrowheads="1"/>
@@ -13608,7 +12733,7 @@
             <a:fld id="{D65C0CEA-0026-4026-B7A3-F7EB76D206AC}" type="slidenum">
               <a:rPr lang="en-US" smtClean="0"/>
               <a:pPr/>
-              <a:t>26</a:t>
+              <a:t>27</a:t>
             </a:fld>
             <a:endParaRPr lang="en-US"/>
           </a:p>
@@ -13627,7 +12752,7 @@
 </p:sld>
 </file>
 
-<file path=ppt/slides/slide27.xml><?xml version="1.0" encoding="utf-8"?>
+<file path=ppt/slides/slide28.xml><?xml version="1.0" encoding="utf-8"?>
 <p:sld xmlns:a="http://schemas.openxmlformats.org/drawingml/2006/main" xmlns:r="http://schemas.openxmlformats.org/officeDocument/2006/relationships" xmlns:p="http://schemas.openxmlformats.org/presentationml/2006/main">
   <p:cSld>
     <p:spTree>
@@ -13946,7 +13071,7 @@
 </p:sld>
 </file>
 
-<file path=ppt/slides/slide28.xml><?xml version="1.0" encoding="utf-8"?>
+<file path=ppt/slides/slide29.xml><?xml version="1.0" encoding="utf-8"?>
 <p:sld xmlns:a="http://schemas.openxmlformats.org/drawingml/2006/main" xmlns:r="http://schemas.openxmlformats.org/officeDocument/2006/relationships" xmlns:p="http://schemas.openxmlformats.org/presentationml/2006/main">
   <p:cSld>
     <p:spTree>
@@ -14168,162 +13293,6 @@
     <p:extLst>
       <p:ext uri="{BB962C8B-B14F-4D97-AF65-F5344CB8AC3E}">
         <p14:creationId xmlns:p14="http://schemas.microsoft.com/office/powerpoint/2010/main" val="2323903342"/>
-      </p:ext>
-    </p:extLst>
-  </p:cSld>
-  <p:clrMapOvr>
-    <a:masterClrMapping/>
-  </p:clrMapOvr>
-</p:sld>
-</file>
-
-<file path=ppt/slides/slide29.xml><?xml version="1.0" encoding="utf-8"?>
-<p:sld xmlns:a="http://schemas.openxmlformats.org/drawingml/2006/main" xmlns:r="http://schemas.openxmlformats.org/officeDocument/2006/relationships" xmlns:p="http://schemas.openxmlformats.org/presentationml/2006/main">
-  <p:cSld>
-    <p:spTree>
-      <p:nvGrpSpPr>
-        <p:cNvPr id="1" name=""/>
-        <p:cNvGrpSpPr/>
-        <p:nvPr/>
-      </p:nvGrpSpPr>
-      <p:grpSpPr>
-        <a:xfrm>
-          <a:off x="0" y="0"/>
-          <a:ext cx="0" cy="0"/>
-          <a:chOff x="0" y="0"/>
-          <a:chExt cx="0" cy="0"/>
-        </a:xfrm>
-      </p:grpSpPr>
-      <p:sp>
-        <p:nvSpPr>
-          <p:cNvPr id="4" name="Date Placeholder 3"/>
-          <p:cNvSpPr>
-            <a:spLocks noGrp="1"/>
-          </p:cNvSpPr>
-          <p:nvPr>
-            <p:ph type="dt" sz="half" idx="10"/>
-          </p:nvPr>
-        </p:nvSpPr>
-        <p:spPr/>
-        <p:txBody>
-          <a:bodyPr/>
-          <a:lstStyle/>
-          <a:p>
-            <a:r>
-              <a:rPr lang="en-US"/>
-              <a:t>Fall 2007</a:t>
-            </a:r>
-          </a:p>
-        </p:txBody>
-      </p:sp>
-      <p:sp>
-        <p:nvSpPr>
-          <p:cNvPr id="5" name="Footer Placeholder 4"/>
-          <p:cNvSpPr>
-            <a:spLocks noGrp="1"/>
-          </p:cNvSpPr>
-          <p:nvPr>
-            <p:ph type="ftr" sz="quarter" idx="11"/>
-          </p:nvPr>
-        </p:nvSpPr>
-        <p:spPr/>
-        <p:txBody>
-          <a:bodyPr/>
-          <a:lstStyle/>
-          <a:p>
-            <a:r>
-              <a:rPr lang="en-US"/>
-              <a:t>R. Todd Lines</a:t>
-            </a:r>
-          </a:p>
-        </p:txBody>
-      </p:sp>
-      <p:sp>
-        <p:nvSpPr>
-          <p:cNvPr id="332802" name="Rectangle 2"/>
-          <p:cNvSpPr>
-            <a:spLocks noGrp="1" noChangeArrowheads="1"/>
-          </p:cNvSpPr>
-          <p:nvPr>
-            <p:ph type="title"/>
-          </p:nvPr>
-        </p:nvSpPr>
-        <p:spPr>
-          <a:xfrm>
-            <a:off x="2057400" y="857250"/>
-            <a:ext cx="5943600" cy="857250"/>
-          </a:xfrm>
-        </p:spPr>
-        <p:txBody>
-          <a:bodyPr>
-            <a:normAutofit fontScale="90000"/>
-          </a:bodyPr>
-          <a:lstStyle/>
-          <a:p>
-            <a:r>
-              <a:rPr lang="en-US"/>
-              <a:t>Images Formed by Flat Mirrors, 4</a:t>
-            </a:r>
-          </a:p>
-        </p:txBody>
-      </p:sp>
-      <p:sp>
-        <p:nvSpPr>
-          <p:cNvPr id="332803" name="Rectangle 3"/>
-          <p:cNvSpPr>
-            <a:spLocks noGrp="1" noChangeArrowheads="1"/>
-          </p:cNvSpPr>
-          <p:nvPr>
-            <p:ph type="body" idx="1"/>
-          </p:nvPr>
-        </p:nvSpPr>
-        <p:spPr/>
-        <p:txBody>
-          <a:bodyPr/>
-          <a:lstStyle/>
-          <a:p>
-            <a:r>
-              <a:rPr lang="en-US" dirty="0"/>
-              <a:t>To observe the image, the observer would trace back the two reflected rays to </a:t>
-            </a:r>
-            <a:r>
-              <a:rPr lang="en-US" i="1" dirty="0"/>
-              <a:t>P’</a:t>
-            </a:r>
-          </a:p>
-          <a:p>
-            <a:r>
-              <a:rPr lang="en-US" dirty="0"/>
-              <a:t>Point </a:t>
-            </a:r>
-            <a:r>
-              <a:rPr lang="en-US" i="1" dirty="0"/>
-              <a:t>P’</a:t>
-            </a:r>
-            <a:r>
-              <a:rPr lang="en-US" dirty="0"/>
-              <a:t> is the point where the rays appear to have originated</a:t>
-            </a:r>
-          </a:p>
-          <a:p>
-            <a:r>
-              <a:rPr lang="en-US" dirty="0"/>
-              <a:t>The image formed by an object placed in front of a flat mirror is as far behind the mirror as the object is in front of the mirror</a:t>
-            </a:r>
-          </a:p>
-          <a:p>
-            <a:pPr lvl="1"/>
-            <a:r>
-              <a:rPr lang="en-US" dirty="0"/>
-              <a:t>|s| = |s’|</a:t>
-            </a:r>
-          </a:p>
-        </p:txBody>
-      </p:sp>
-    </p:spTree>
-    <p:extLst>
-      <p:ext uri="{BB962C8B-B14F-4D97-AF65-F5344CB8AC3E}">
-        <p14:creationId xmlns:p14="http://schemas.microsoft.com/office/powerpoint/2010/main" val="3962036119"/>
       </p:ext>
     </p:extLst>
   </p:cSld>
@@ -14778,6 +13747,162 @@
 </file>
 
 <file path=ppt/slides/slide30.xml><?xml version="1.0" encoding="utf-8"?>
+<p:sld xmlns:a="http://schemas.openxmlformats.org/drawingml/2006/main" xmlns:r="http://schemas.openxmlformats.org/officeDocument/2006/relationships" xmlns:p="http://schemas.openxmlformats.org/presentationml/2006/main">
+  <p:cSld>
+    <p:spTree>
+      <p:nvGrpSpPr>
+        <p:cNvPr id="1" name=""/>
+        <p:cNvGrpSpPr/>
+        <p:nvPr/>
+      </p:nvGrpSpPr>
+      <p:grpSpPr>
+        <a:xfrm>
+          <a:off x="0" y="0"/>
+          <a:ext cx="0" cy="0"/>
+          <a:chOff x="0" y="0"/>
+          <a:chExt cx="0" cy="0"/>
+        </a:xfrm>
+      </p:grpSpPr>
+      <p:sp>
+        <p:nvSpPr>
+          <p:cNvPr id="4" name="Date Placeholder 3"/>
+          <p:cNvSpPr>
+            <a:spLocks noGrp="1"/>
+          </p:cNvSpPr>
+          <p:nvPr>
+            <p:ph type="dt" sz="half" idx="10"/>
+          </p:nvPr>
+        </p:nvSpPr>
+        <p:spPr/>
+        <p:txBody>
+          <a:bodyPr/>
+          <a:lstStyle/>
+          <a:p>
+            <a:r>
+              <a:rPr lang="en-US"/>
+              <a:t>Fall 2007</a:t>
+            </a:r>
+          </a:p>
+        </p:txBody>
+      </p:sp>
+      <p:sp>
+        <p:nvSpPr>
+          <p:cNvPr id="5" name="Footer Placeholder 4"/>
+          <p:cNvSpPr>
+            <a:spLocks noGrp="1"/>
+          </p:cNvSpPr>
+          <p:nvPr>
+            <p:ph type="ftr" sz="quarter" idx="11"/>
+          </p:nvPr>
+        </p:nvSpPr>
+        <p:spPr/>
+        <p:txBody>
+          <a:bodyPr/>
+          <a:lstStyle/>
+          <a:p>
+            <a:r>
+              <a:rPr lang="en-US"/>
+              <a:t>R. Todd Lines</a:t>
+            </a:r>
+          </a:p>
+        </p:txBody>
+      </p:sp>
+      <p:sp>
+        <p:nvSpPr>
+          <p:cNvPr id="332802" name="Rectangle 2"/>
+          <p:cNvSpPr>
+            <a:spLocks noGrp="1" noChangeArrowheads="1"/>
+          </p:cNvSpPr>
+          <p:nvPr>
+            <p:ph type="title"/>
+          </p:nvPr>
+        </p:nvSpPr>
+        <p:spPr>
+          <a:xfrm>
+            <a:off x="2057400" y="857250"/>
+            <a:ext cx="5943600" cy="857250"/>
+          </a:xfrm>
+        </p:spPr>
+        <p:txBody>
+          <a:bodyPr>
+            <a:normAutofit fontScale="90000"/>
+          </a:bodyPr>
+          <a:lstStyle/>
+          <a:p>
+            <a:r>
+              <a:rPr lang="en-US"/>
+              <a:t>Images Formed by Flat Mirrors, 4</a:t>
+            </a:r>
+          </a:p>
+        </p:txBody>
+      </p:sp>
+      <p:sp>
+        <p:nvSpPr>
+          <p:cNvPr id="332803" name="Rectangle 3"/>
+          <p:cNvSpPr>
+            <a:spLocks noGrp="1" noChangeArrowheads="1"/>
+          </p:cNvSpPr>
+          <p:nvPr>
+            <p:ph type="body" idx="1"/>
+          </p:nvPr>
+        </p:nvSpPr>
+        <p:spPr/>
+        <p:txBody>
+          <a:bodyPr/>
+          <a:lstStyle/>
+          <a:p>
+            <a:r>
+              <a:rPr lang="en-US" dirty="0"/>
+              <a:t>To observe the image, the observer would trace back the two reflected rays to </a:t>
+            </a:r>
+            <a:r>
+              <a:rPr lang="en-US" i="1" dirty="0"/>
+              <a:t>P’</a:t>
+            </a:r>
+          </a:p>
+          <a:p>
+            <a:r>
+              <a:rPr lang="en-US" dirty="0"/>
+              <a:t>Point </a:t>
+            </a:r>
+            <a:r>
+              <a:rPr lang="en-US" i="1" dirty="0"/>
+              <a:t>P’</a:t>
+            </a:r>
+            <a:r>
+              <a:rPr lang="en-US" dirty="0"/>
+              <a:t> is the point where the rays appear to have originated</a:t>
+            </a:r>
+          </a:p>
+          <a:p>
+            <a:r>
+              <a:rPr lang="en-US" dirty="0"/>
+              <a:t>The image formed by an object placed in front of a flat mirror is as far behind the mirror as the object is in front of the mirror</a:t>
+            </a:r>
+          </a:p>
+          <a:p>
+            <a:pPr lvl="1"/>
+            <a:r>
+              <a:rPr lang="en-US" dirty="0"/>
+              <a:t>|s| = |s’|</a:t>
+            </a:r>
+          </a:p>
+        </p:txBody>
+      </p:sp>
+    </p:spTree>
+    <p:extLst>
+      <p:ext uri="{BB962C8B-B14F-4D97-AF65-F5344CB8AC3E}">
+        <p14:creationId xmlns:p14="http://schemas.microsoft.com/office/powerpoint/2010/main" val="3962036119"/>
+      </p:ext>
+    </p:extLst>
+  </p:cSld>
+  <p:clrMapOvr>
+    <a:masterClrMapping/>
+  </p:clrMapOvr>
+</p:sld>
+</file>
+
+<file path=ppt/slides/slide31.xml><?xml version="1.0" encoding="utf-8"?>
 <p:sld xmlns:a="http://schemas.openxmlformats.org/drawingml/2006/main" xmlns:r="http://schemas.openxmlformats.org/officeDocument/2006/relationships" xmlns:p="http://schemas.openxmlformats.org/presentationml/2006/main">
   <p:cSld>
     <p:spTree>
@@ -15013,7 +14138,7 @@
 </p:sld>
 </file>
 
-<file path=ppt/slides/slide31.xml><?xml version="1.0" encoding="utf-8"?>
+<file path=ppt/slides/slide32.xml><?xml version="1.0" encoding="utf-8"?>
 <p:sld xmlns:a="http://schemas.openxmlformats.org/drawingml/2006/main" xmlns:r="http://schemas.openxmlformats.org/officeDocument/2006/relationships" xmlns:p="http://schemas.openxmlformats.org/presentationml/2006/main">
   <p:cSld>
     <p:spTree>
@@ -15163,7 +14288,7 @@
 </p:sld>
 </file>
 
-<file path=ppt/slides/slide32.xml><?xml version="1.0" encoding="utf-8"?>
+<file path=ppt/slides/slide33.xml><?xml version="1.0" encoding="utf-8"?>
 <p:sld xmlns:a="http://schemas.openxmlformats.org/drawingml/2006/main" xmlns:r="http://schemas.openxmlformats.org/officeDocument/2006/relationships" xmlns:p="http://schemas.openxmlformats.org/presentationml/2006/main">
   <p:cSld>
     <p:spTree>
@@ -15330,7 +14455,7 @@
 </p:sld>
 </file>
 
-<file path=ppt/slides/slide33.xml><?xml version="1.0" encoding="utf-8"?>
+<file path=ppt/slides/slide34.xml><?xml version="1.0" encoding="utf-8"?>
 <p:sld xmlns:a="http://schemas.openxmlformats.org/drawingml/2006/main" xmlns:r="http://schemas.openxmlformats.org/officeDocument/2006/relationships" xmlns:p="http://schemas.openxmlformats.org/presentationml/2006/main">
   <p:cSld>
     <p:spTree>
@@ -15837,7 +14962,7 @@
 </p:sld>
 </file>
 
-<file path=ppt/slides/slide34.xml><?xml version="1.0" encoding="utf-8"?>
+<file path=ppt/slides/slide35.xml><?xml version="1.0" encoding="utf-8"?>
 <p:sld xmlns:a="http://schemas.openxmlformats.org/drawingml/2006/main" xmlns:r="http://schemas.openxmlformats.org/officeDocument/2006/relationships" xmlns:p="http://schemas.openxmlformats.org/presentationml/2006/main">
   <p:cSld>
     <p:spTree>
@@ -15976,7 +15101,7 @@
               <a:pPr>
                 <a:defRPr/>
               </a:pPr>
-              <a:t>34</a:t>
+              <a:t>35</a:t>
             </a:fld>
             <a:endParaRPr lang="en-US"/>
           </a:p>
@@ -16028,7 +15153,7 @@
 </p:sld>
 </file>
 
-<file path=ppt/slides/slide35.xml><?xml version="1.0" encoding="utf-8"?>
+<file path=ppt/slides/slide36.xml><?xml version="1.0" encoding="utf-8"?>
 <p:sld xmlns:a="http://schemas.openxmlformats.org/drawingml/2006/main" xmlns:r="http://schemas.openxmlformats.org/officeDocument/2006/relationships" xmlns:p="http://schemas.openxmlformats.org/presentationml/2006/main">
   <p:cSld>
     <p:spTree>
@@ -16124,7 +15249,7 @@
 </p:sld>
 </file>
 
-<file path=ppt/slides/slide36.xml><?xml version="1.0" encoding="utf-8"?>
+<file path=ppt/slides/slide37.xml><?xml version="1.0" encoding="utf-8"?>
 <p:sld xmlns:a="http://schemas.openxmlformats.org/drawingml/2006/main" xmlns:r="http://schemas.openxmlformats.org/officeDocument/2006/relationships" xmlns:p="http://schemas.openxmlformats.org/presentationml/2006/main">
   <p:cSld>
     <p:spTree>
@@ -16220,7 +15345,7 @@
 </p:sld>
 </file>
 
-<file path=ppt/slides/slide37.xml><?xml version="1.0" encoding="utf-8"?>
+<file path=ppt/slides/slide38.xml><?xml version="1.0" encoding="utf-8"?>
 <p:sld xmlns:a="http://schemas.openxmlformats.org/drawingml/2006/main" xmlns:r="http://schemas.openxmlformats.org/officeDocument/2006/relationships" xmlns:p="http://schemas.openxmlformats.org/presentationml/2006/main">
   <p:cSld>
     <p:spTree>
@@ -16340,89 +15465,6 @@
 </p:sld>
 </file>
 
-<file path=ppt/slides/slide38.xml><?xml version="1.0" encoding="utf-8"?>
-<p:sld xmlns:a="http://schemas.openxmlformats.org/drawingml/2006/main" xmlns:r="http://schemas.openxmlformats.org/officeDocument/2006/relationships" xmlns:p="http://schemas.openxmlformats.org/presentationml/2006/main">
-  <p:cSld>
-    <p:spTree>
-      <p:nvGrpSpPr>
-        <p:cNvPr id="1" name=""/>
-        <p:cNvGrpSpPr/>
-        <p:nvPr/>
-      </p:nvGrpSpPr>
-      <p:grpSpPr>
-        <a:xfrm>
-          <a:off x="0" y="0"/>
-          <a:ext cx="0" cy="0"/>
-          <a:chOff x="0" y="0"/>
-          <a:chExt cx="0" cy="0"/>
-        </a:xfrm>
-      </p:grpSpPr>
-      <p:sp>
-        <p:nvSpPr>
-          <p:cNvPr id="2" name="Title 1">
-            <a:extLst>
-              <a:ext uri="{FF2B5EF4-FFF2-40B4-BE49-F238E27FC236}">
-                <a16:creationId xmlns:a16="http://schemas.microsoft.com/office/drawing/2014/main" id="{245F012C-BBF0-ADC1-48C3-5A85CECCC169}"/>
-              </a:ext>
-            </a:extLst>
-          </p:cNvPr>
-          <p:cNvSpPr>
-            <a:spLocks noGrp="1"/>
-          </p:cNvSpPr>
-          <p:nvPr>
-            <p:ph type="ctrTitle"/>
-          </p:nvPr>
-        </p:nvSpPr>
-        <p:spPr/>
-        <p:txBody>
-          <a:bodyPr/>
-          <a:lstStyle/>
-          <a:p>
-            <a:r>
-              <a:rPr lang="en-US" dirty="0"/>
-              <a:t>END</a:t>
-            </a:r>
-          </a:p>
-        </p:txBody>
-      </p:sp>
-      <p:sp>
-        <p:nvSpPr>
-          <p:cNvPr id="3" name="Subtitle 2">
-            <a:extLst>
-              <a:ext uri="{FF2B5EF4-FFF2-40B4-BE49-F238E27FC236}">
-                <a16:creationId xmlns:a16="http://schemas.microsoft.com/office/drawing/2014/main" id="{43E5CDA9-8DB1-C60D-1658-C1FE4F9B3D8B}"/>
-              </a:ext>
-            </a:extLst>
-          </p:cNvPr>
-          <p:cNvSpPr>
-            <a:spLocks noGrp="1"/>
-          </p:cNvSpPr>
-          <p:nvPr>
-            <p:ph type="subTitle" idx="1"/>
-          </p:nvPr>
-        </p:nvSpPr>
-        <p:spPr/>
-        <p:txBody>
-          <a:bodyPr/>
-          <a:lstStyle/>
-          <a:p>
-            <a:endParaRPr lang="en-US"/>
-          </a:p>
-        </p:txBody>
-      </p:sp>
-    </p:spTree>
-    <p:extLst>
-      <p:ext uri="{BB962C8B-B14F-4D97-AF65-F5344CB8AC3E}">
-        <p14:creationId xmlns:p14="http://schemas.microsoft.com/office/powerpoint/2010/main" val="1908266085"/>
-      </p:ext>
-    </p:extLst>
-  </p:cSld>
-  <p:clrMapOvr>
-    <a:masterClrMapping/>
-  </p:clrMapOvr>
-</p:sld>
-</file>
-
 <file path=ppt/slides/slide39.xml><?xml version="1.0" encoding="utf-8"?>
 <p:sld xmlns:a="http://schemas.openxmlformats.org/drawingml/2006/main" xmlns:r="http://schemas.openxmlformats.org/officeDocument/2006/relationships" xmlns:p="http://schemas.openxmlformats.org/presentationml/2006/main">
   <p:cSld>
@@ -16442,10 +15484,10 @@
       </p:grpSpPr>
       <p:sp>
         <p:nvSpPr>
-          <p:cNvPr id="4" name="Title 3">
+          <p:cNvPr id="2" name="Title 1">
             <a:extLst>
               <a:ext uri="{FF2B5EF4-FFF2-40B4-BE49-F238E27FC236}">
-                <a16:creationId xmlns:a16="http://schemas.microsoft.com/office/drawing/2014/main" id="{FFBAB1B2-47BA-5E31-620D-66C41272ED65}"/>
+                <a16:creationId xmlns:a16="http://schemas.microsoft.com/office/drawing/2014/main" id="{245F012C-BBF0-ADC1-48C3-5A85CECCC169}"/>
               </a:ext>
             </a:extLst>
           </p:cNvPr>
@@ -16463,17 +15505,17 @@
           <a:p>
             <a:r>
               <a:rPr lang="en-US" dirty="0"/>
-              <a:t>End</a:t>
-            </a:r>
-          </a:p>
-        </p:txBody>
-      </p:sp>
-      <p:sp>
-        <p:nvSpPr>
-          <p:cNvPr id="5" name="Subtitle 4">
+              <a:t>END</a:t>
+            </a:r>
+          </a:p>
+        </p:txBody>
+      </p:sp>
+      <p:sp>
+        <p:nvSpPr>
+          <p:cNvPr id="3" name="Subtitle 2">
             <a:extLst>
               <a:ext uri="{FF2B5EF4-FFF2-40B4-BE49-F238E27FC236}">
-                <a16:creationId xmlns:a16="http://schemas.microsoft.com/office/drawing/2014/main" id="{F4A352C9-EFEE-DF66-5F11-AEF140722258}"/>
+                <a16:creationId xmlns:a16="http://schemas.microsoft.com/office/drawing/2014/main" id="{43E5CDA9-8DB1-C60D-1658-C1FE4F9B3D8B}"/>
               </a:ext>
             </a:extLst>
           </p:cNvPr>
@@ -16496,7 +15538,7 @@
     </p:spTree>
     <p:extLst>
       <p:ext uri="{BB962C8B-B14F-4D97-AF65-F5344CB8AC3E}">
-        <p14:creationId xmlns:p14="http://schemas.microsoft.com/office/powerpoint/2010/main" val="1678363897"/>
+        <p14:creationId xmlns:p14="http://schemas.microsoft.com/office/powerpoint/2010/main" val="1908266085"/>
       </p:ext>
     </p:extLst>
   </p:cSld>
@@ -16602,6 +15644,89 @@
 </file>
 
 <file path=ppt/slides/slide40.xml><?xml version="1.0" encoding="utf-8"?>
+<p:sld xmlns:a="http://schemas.openxmlformats.org/drawingml/2006/main" xmlns:r="http://schemas.openxmlformats.org/officeDocument/2006/relationships" xmlns:p="http://schemas.openxmlformats.org/presentationml/2006/main">
+  <p:cSld>
+    <p:spTree>
+      <p:nvGrpSpPr>
+        <p:cNvPr id="1" name=""/>
+        <p:cNvGrpSpPr/>
+        <p:nvPr/>
+      </p:nvGrpSpPr>
+      <p:grpSpPr>
+        <a:xfrm>
+          <a:off x="0" y="0"/>
+          <a:ext cx="0" cy="0"/>
+          <a:chOff x="0" y="0"/>
+          <a:chExt cx="0" cy="0"/>
+        </a:xfrm>
+      </p:grpSpPr>
+      <p:sp>
+        <p:nvSpPr>
+          <p:cNvPr id="4" name="Title 3">
+            <a:extLst>
+              <a:ext uri="{FF2B5EF4-FFF2-40B4-BE49-F238E27FC236}">
+                <a16:creationId xmlns:a16="http://schemas.microsoft.com/office/drawing/2014/main" id="{FFBAB1B2-47BA-5E31-620D-66C41272ED65}"/>
+              </a:ext>
+            </a:extLst>
+          </p:cNvPr>
+          <p:cNvSpPr>
+            <a:spLocks noGrp="1"/>
+          </p:cNvSpPr>
+          <p:nvPr>
+            <p:ph type="ctrTitle"/>
+          </p:nvPr>
+        </p:nvSpPr>
+        <p:spPr/>
+        <p:txBody>
+          <a:bodyPr/>
+          <a:lstStyle/>
+          <a:p>
+            <a:r>
+              <a:rPr lang="en-US" dirty="0"/>
+              <a:t>End</a:t>
+            </a:r>
+          </a:p>
+        </p:txBody>
+      </p:sp>
+      <p:sp>
+        <p:nvSpPr>
+          <p:cNvPr id="5" name="Subtitle 4">
+            <a:extLst>
+              <a:ext uri="{FF2B5EF4-FFF2-40B4-BE49-F238E27FC236}">
+                <a16:creationId xmlns:a16="http://schemas.microsoft.com/office/drawing/2014/main" id="{F4A352C9-EFEE-DF66-5F11-AEF140722258}"/>
+              </a:ext>
+            </a:extLst>
+          </p:cNvPr>
+          <p:cNvSpPr>
+            <a:spLocks noGrp="1"/>
+          </p:cNvSpPr>
+          <p:nvPr>
+            <p:ph type="subTitle" idx="1"/>
+          </p:nvPr>
+        </p:nvSpPr>
+        <p:spPr/>
+        <p:txBody>
+          <a:bodyPr/>
+          <a:lstStyle/>
+          <a:p>
+            <a:endParaRPr lang="en-US"/>
+          </a:p>
+        </p:txBody>
+      </p:sp>
+    </p:spTree>
+    <p:extLst>
+      <p:ext uri="{BB962C8B-B14F-4D97-AF65-F5344CB8AC3E}">
+        <p14:creationId xmlns:p14="http://schemas.microsoft.com/office/powerpoint/2010/main" val="1678363897"/>
+      </p:ext>
+    </p:extLst>
+  </p:cSld>
+  <p:clrMapOvr>
+    <a:masterClrMapping/>
+  </p:clrMapOvr>
+</p:sld>
+</file>
+
+<file path=ppt/slides/slide41.xml><?xml version="1.0" encoding="utf-8"?>
 <p:sld xmlns:a="http://schemas.openxmlformats.org/drawingml/2006/main" xmlns:r="http://schemas.openxmlformats.org/officeDocument/2006/relationships" xmlns:p="http://schemas.openxmlformats.org/presentationml/2006/main">
   <p:cSld>
     <p:spTree>
@@ -17045,7 +16170,7 @@
 </p:sld>
 </file>
 
-<file path=ppt/slides/slide41.xml><?xml version="1.0" encoding="utf-8"?>
+<file path=ppt/slides/slide42.xml><?xml version="1.0" encoding="utf-8"?>
 <p:sld xmlns:a="http://schemas.openxmlformats.org/drawingml/2006/main" xmlns:r="http://schemas.openxmlformats.org/officeDocument/2006/relationships" xmlns:p="http://schemas.openxmlformats.org/presentationml/2006/main">
   <p:cSld>
     <p:spTree>
@@ -17140,7 +16265,7 @@
 </p:sld>
 </file>
 
-<file path=ppt/slides/slide42.xml><?xml version="1.0" encoding="utf-8"?>
+<file path=ppt/slides/slide43.xml><?xml version="1.0" encoding="utf-8"?>
 <p:sld xmlns:a="http://schemas.openxmlformats.org/drawingml/2006/main" xmlns:r="http://schemas.openxmlformats.org/officeDocument/2006/relationships" xmlns:p="http://schemas.openxmlformats.org/presentationml/2006/main">
   <p:cSld>
     <p:spTree>
@@ -17353,7 +16478,7 @@
 </p:sld>
 </file>
 
-<file path=ppt/slides/slide43.xml><?xml version="1.0" encoding="utf-8"?>
+<file path=ppt/slides/slide44.xml><?xml version="1.0" encoding="utf-8"?>
 <p:sld xmlns:a="http://schemas.openxmlformats.org/drawingml/2006/main" xmlns:r="http://schemas.openxmlformats.org/officeDocument/2006/relationships" xmlns:p="http://schemas.openxmlformats.org/presentationml/2006/main">
   <p:cSld>
     <p:spTree>
@@ -17411,7 +16536,7 @@
 </p:sld>
 </file>
 
-<file path=ppt/slides/slide44.xml><?xml version="1.0" encoding="utf-8"?>
+<file path=ppt/slides/slide45.xml><?xml version="1.0" encoding="utf-8"?>
 <p:sld xmlns:a="http://schemas.openxmlformats.org/drawingml/2006/main" xmlns:r="http://schemas.openxmlformats.org/officeDocument/2006/relationships" xmlns:p="http://schemas.openxmlformats.org/presentationml/2006/main">
   <p:cSld>
     <p:spTree>
@@ -17582,7 +16707,7 @@
 </p:sld>
 </file>
 
-<file path=ppt/slides/slide45.xml><?xml version="1.0" encoding="utf-8"?>
+<file path=ppt/slides/slide46.xml><?xml version="1.0" encoding="utf-8"?>
 <p:sld xmlns:a="http://schemas.openxmlformats.org/drawingml/2006/main" xmlns:r="http://schemas.openxmlformats.org/officeDocument/2006/relationships" xmlns:p="http://schemas.openxmlformats.org/presentationml/2006/main">
   <p:cSld>
     <p:spTree>
@@ -17642,7 +16767,7 @@
 </p:sld>
 </file>
 
-<file path=ppt/slides/slide46.xml><?xml version="1.0" encoding="utf-8"?>
+<file path=ppt/slides/slide47.xml><?xml version="1.0" encoding="utf-8"?>
 <p:sld xmlns:a="http://schemas.openxmlformats.org/drawingml/2006/main" xmlns:r="http://schemas.openxmlformats.org/officeDocument/2006/relationships" xmlns:p="http://schemas.openxmlformats.org/presentationml/2006/main">
   <p:cSld>
     <p:spTree>
@@ -17700,7 +16825,7 @@
 </p:sld>
 </file>
 
-<file path=ppt/slides/slide47.xml><?xml version="1.0" encoding="utf-8"?>
+<file path=ppt/slides/slide48.xml><?xml version="1.0" encoding="utf-8"?>
 <p:sld xmlns:a="http://schemas.openxmlformats.org/drawingml/2006/main" xmlns:r="http://schemas.openxmlformats.org/officeDocument/2006/relationships" xmlns:p="http://schemas.openxmlformats.org/presentationml/2006/main">
   <p:cSld>
     <p:spTree>
@@ -20240,7 +19365,7 @@
 </p:sld>
 </file>
 
-<file path=ppt/slides/slide48.xml><?xml version="1.0" encoding="utf-8"?>
+<file path=ppt/slides/slide49.xml><?xml version="1.0" encoding="utf-8"?>
 <p:sld xmlns:a="http://schemas.openxmlformats.org/drawingml/2006/main" xmlns:r="http://schemas.openxmlformats.org/officeDocument/2006/relationships" xmlns:p="http://schemas.openxmlformats.org/presentationml/2006/main">
   <p:cSld>
     <p:spTree>
@@ -22518,120 +21643,6 @@
 </p:sld>
 </file>
 
-<file path=ppt/slides/slide49.xml><?xml version="1.0" encoding="utf-8"?>
-<p:sld xmlns:a="http://schemas.openxmlformats.org/drawingml/2006/main" xmlns:r="http://schemas.openxmlformats.org/officeDocument/2006/relationships" xmlns:p="http://schemas.openxmlformats.org/presentationml/2006/main">
-  <p:cSld>
-    <p:spTree>
-      <p:nvGrpSpPr>
-        <p:cNvPr id="1" name=""/>
-        <p:cNvGrpSpPr/>
-        <p:nvPr/>
-      </p:nvGrpSpPr>
-      <p:grpSpPr>
-        <a:xfrm>
-          <a:off x="0" y="0"/>
-          <a:ext cx="0" cy="0"/>
-          <a:chOff x="0" y="0"/>
-          <a:chExt cx="0" cy="0"/>
-        </a:xfrm>
-      </p:grpSpPr>
-      <p:sp>
-        <p:nvSpPr>
-          <p:cNvPr id="2" name="Title 1"/>
-          <p:cNvSpPr>
-            <a:spLocks noGrp="1"/>
-          </p:cNvSpPr>
-          <p:nvPr>
-            <p:ph type="title"/>
-          </p:nvPr>
-        </p:nvSpPr>
-        <p:spPr/>
-        <p:txBody>
-          <a:bodyPr/>
-          <a:lstStyle/>
-          <a:p>
-            <a:endParaRPr lang="en-US"/>
-          </a:p>
-        </p:txBody>
-      </p:sp>
-      <p:sp>
-        <p:nvSpPr>
-          <p:cNvPr id="3" name="Text Placeholder 2"/>
-          <p:cNvSpPr>
-            <a:spLocks noGrp="1"/>
-          </p:cNvSpPr>
-          <p:nvPr>
-            <p:ph type="body" sz="half" idx="1"/>
-          </p:nvPr>
-        </p:nvSpPr>
-        <p:spPr/>
-        <p:txBody>
-          <a:bodyPr/>
-          <a:lstStyle/>
-          <a:p>
-            <a:endParaRPr lang="en-US"/>
-          </a:p>
-        </p:txBody>
-      </p:sp>
-      <p:sp>
-        <p:nvSpPr>
-          <p:cNvPr id="4" name="ClipArt Placeholder 3"/>
-          <p:cNvSpPr>
-            <a:spLocks noGrp="1"/>
-          </p:cNvSpPr>
-          <p:nvPr>
-            <p:ph type="clipArt" sz="half" idx="2"/>
-          </p:nvPr>
-        </p:nvSpPr>
-        <p:spPr/>
-        <p:txBody>
-          <a:bodyPr/>
-          <a:lstStyle/>
-          <a:p>
-            <a:endParaRPr lang="en-US"/>
-          </a:p>
-        </p:txBody>
-      </p:sp>
-      <p:pic>
-        <p:nvPicPr>
-          <p:cNvPr id="2050" name="Picture 2"/>
-          <p:cNvPicPr>
-            <a:picLocks noChangeAspect="1" noChangeArrowheads="1"/>
-          </p:cNvPicPr>
-          <p:nvPr/>
-        </p:nvPicPr>
-        <p:blipFill>
-          <a:blip r:embed="rId2" cstate="print"/>
-          <a:srcRect/>
-          <a:stretch>
-            <a:fillRect/>
-          </a:stretch>
-        </p:blipFill>
-        <p:spPr bwMode="auto">
-          <a:xfrm>
-            <a:off x="1000125" y="1862138"/>
-            <a:ext cx="7143750" cy="3133725"/>
-          </a:xfrm>
-          <a:prstGeom prst="rect">
-            <a:avLst/>
-          </a:prstGeom>
-          <a:noFill/>
-          <a:ln w="9525">
-            <a:noFill/>
-            <a:miter lim="800000"/>
-            <a:headEnd/>
-            <a:tailEnd/>
-          </a:ln>
-        </p:spPr>
-      </p:pic>
-    </p:spTree>
-  </p:cSld>
-  <p:clrMapOvr>
-    <a:masterClrMapping/>
-  </p:clrMapOvr>
-</p:sld>
-</file>
-
 <file path=ppt/slides/slide5.xml><?xml version="1.0" encoding="utf-8"?>
 <p:sld xmlns:a="http://schemas.openxmlformats.org/drawingml/2006/main" xmlns:r="http://schemas.openxmlformats.org/officeDocument/2006/relationships" xmlns:p="http://schemas.openxmlformats.org/presentationml/2006/main">
   <p:cSld>
@@ -22846,6 +21857,120 @@
 </file>
 
 <file path=ppt/slides/slide50.xml><?xml version="1.0" encoding="utf-8"?>
+<p:sld xmlns:a="http://schemas.openxmlformats.org/drawingml/2006/main" xmlns:r="http://schemas.openxmlformats.org/officeDocument/2006/relationships" xmlns:p="http://schemas.openxmlformats.org/presentationml/2006/main">
+  <p:cSld>
+    <p:spTree>
+      <p:nvGrpSpPr>
+        <p:cNvPr id="1" name=""/>
+        <p:cNvGrpSpPr/>
+        <p:nvPr/>
+      </p:nvGrpSpPr>
+      <p:grpSpPr>
+        <a:xfrm>
+          <a:off x="0" y="0"/>
+          <a:ext cx="0" cy="0"/>
+          <a:chOff x="0" y="0"/>
+          <a:chExt cx="0" cy="0"/>
+        </a:xfrm>
+      </p:grpSpPr>
+      <p:sp>
+        <p:nvSpPr>
+          <p:cNvPr id="2" name="Title 1"/>
+          <p:cNvSpPr>
+            <a:spLocks noGrp="1"/>
+          </p:cNvSpPr>
+          <p:nvPr>
+            <p:ph type="title"/>
+          </p:nvPr>
+        </p:nvSpPr>
+        <p:spPr/>
+        <p:txBody>
+          <a:bodyPr/>
+          <a:lstStyle/>
+          <a:p>
+            <a:endParaRPr lang="en-US"/>
+          </a:p>
+        </p:txBody>
+      </p:sp>
+      <p:sp>
+        <p:nvSpPr>
+          <p:cNvPr id="3" name="Text Placeholder 2"/>
+          <p:cNvSpPr>
+            <a:spLocks noGrp="1"/>
+          </p:cNvSpPr>
+          <p:nvPr>
+            <p:ph type="body" sz="half" idx="1"/>
+          </p:nvPr>
+        </p:nvSpPr>
+        <p:spPr/>
+        <p:txBody>
+          <a:bodyPr/>
+          <a:lstStyle/>
+          <a:p>
+            <a:endParaRPr lang="en-US"/>
+          </a:p>
+        </p:txBody>
+      </p:sp>
+      <p:sp>
+        <p:nvSpPr>
+          <p:cNvPr id="4" name="ClipArt Placeholder 3"/>
+          <p:cNvSpPr>
+            <a:spLocks noGrp="1"/>
+          </p:cNvSpPr>
+          <p:nvPr>
+            <p:ph type="clipArt" sz="half" idx="2"/>
+          </p:nvPr>
+        </p:nvSpPr>
+        <p:spPr/>
+        <p:txBody>
+          <a:bodyPr/>
+          <a:lstStyle/>
+          <a:p>
+            <a:endParaRPr lang="en-US"/>
+          </a:p>
+        </p:txBody>
+      </p:sp>
+      <p:pic>
+        <p:nvPicPr>
+          <p:cNvPr id="2050" name="Picture 2"/>
+          <p:cNvPicPr>
+            <a:picLocks noChangeAspect="1" noChangeArrowheads="1"/>
+          </p:cNvPicPr>
+          <p:nvPr/>
+        </p:nvPicPr>
+        <p:blipFill>
+          <a:blip r:embed="rId2" cstate="print"/>
+          <a:srcRect/>
+          <a:stretch>
+            <a:fillRect/>
+          </a:stretch>
+        </p:blipFill>
+        <p:spPr bwMode="auto">
+          <a:xfrm>
+            <a:off x="1000125" y="1862138"/>
+            <a:ext cx="7143750" cy="3133725"/>
+          </a:xfrm>
+          <a:prstGeom prst="rect">
+            <a:avLst/>
+          </a:prstGeom>
+          <a:noFill/>
+          <a:ln w="9525">
+            <a:noFill/>
+            <a:miter lim="800000"/>
+            <a:headEnd/>
+            <a:tailEnd/>
+          </a:ln>
+        </p:spPr>
+      </p:pic>
+    </p:spTree>
+  </p:cSld>
+  <p:clrMapOvr>
+    <a:masterClrMapping/>
+  </p:clrMapOvr>
+</p:sld>
+</file>
+
+<file path=ppt/slides/slide51.xml><?xml version="1.0" encoding="utf-8"?>
 <p:sld xmlns:a="http://schemas.openxmlformats.org/drawingml/2006/main" xmlns:r="http://schemas.openxmlformats.org/officeDocument/2006/relationships" xmlns:p="http://schemas.openxmlformats.org/presentationml/2006/main">
   <p:cSld>
     <p:spTree>
@@ -22994,7 +22119,7 @@
 </p:sld>
 </file>
 
-<file path=ppt/slides/slide51.xml><?xml version="1.0" encoding="utf-8"?>
+<file path=ppt/slides/slide52.xml><?xml version="1.0" encoding="utf-8"?>
 <p:sld xmlns:a="http://schemas.openxmlformats.org/drawingml/2006/main" xmlns:r="http://schemas.openxmlformats.org/officeDocument/2006/relationships" xmlns:p="http://schemas.openxmlformats.org/presentationml/2006/main">
   <p:cSld>
     <p:spTree>
@@ -23052,7 +22177,7 @@
 </p:sld>
 </file>
 
-<file path=ppt/slides/slide52.xml><?xml version="1.0" encoding="utf-8"?>
+<file path=ppt/slides/slide53.xml><?xml version="1.0" encoding="utf-8"?>
 <p:sld xmlns:a="http://schemas.openxmlformats.org/drawingml/2006/main" xmlns:r="http://schemas.openxmlformats.org/officeDocument/2006/relationships" xmlns:p="http://schemas.openxmlformats.org/presentationml/2006/main">
   <p:cSld>
     <p:spTree>
@@ -23226,7 +22351,7 @@
 </p:sld>
 </file>
 
-<file path=ppt/slides/slide53.xml><?xml version="1.0" encoding="utf-8"?>
+<file path=ppt/slides/slide54.xml><?xml version="1.0" encoding="utf-8"?>
 <p:sld xmlns:a="http://schemas.openxmlformats.org/drawingml/2006/main" xmlns:r="http://schemas.openxmlformats.org/officeDocument/2006/relationships" xmlns:p="http://schemas.openxmlformats.org/presentationml/2006/main">
   <p:cSld>
     <p:spTree>
@@ -23349,7 +22474,7 @@
 </p:sld>
 </file>
 
-<file path=ppt/slides/slide54.xml><?xml version="1.0" encoding="utf-8"?>
+<file path=ppt/slides/slide55.xml><?xml version="1.0" encoding="utf-8"?>
 <p:sld xmlns:a="http://schemas.openxmlformats.org/drawingml/2006/main" xmlns:r="http://schemas.openxmlformats.org/officeDocument/2006/relationships" xmlns:p="http://schemas.openxmlformats.org/presentationml/2006/main">
   <p:cSld>
     <p:spTree>
@@ -23474,7 +22599,7 @@
 </p:sld>
 </file>
 
-<file path=ppt/slides/slide55.xml><?xml version="1.0" encoding="utf-8"?>
+<file path=ppt/slides/slide56.xml><?xml version="1.0" encoding="utf-8"?>
 <p:sld xmlns:a="http://schemas.openxmlformats.org/drawingml/2006/main" xmlns:r="http://schemas.openxmlformats.org/officeDocument/2006/relationships" xmlns:p="http://schemas.openxmlformats.org/presentationml/2006/main">
   <p:cSld>
     <p:spTree>
